--- a/Topic_E/Exam_Practice/TE-L08_Speaking_Workshop_Travel_Cultural_Exchange_and_Understanding.pptx
+++ b/Topic_E/Exam_Practice/TE-L08_Speaking_Workshop_Travel_Cultural_Exchange_and_Understanding.pptx
@@ -615,7 +615,11 @@
           <a:lstStyle/>
           <a:p>
             <a:r>
-              <a:rPr lang="en-US" dirty="0"/>
+              <a:rPr lang="ar-SA" dirty="0">
+                <a:latin typeface="Amiri" pitchFamily="2" charset="-78"/>
+                <a:ea typeface="Amiri" pitchFamily="2" charset="-78"/>
+                <a:cs typeface="Amiri" pitchFamily="2" charset="-78"/>
+              </a:rPr>
               <a:t>ROLE PLAY C (Develop) — an exchange debrief.
 SET-UP IN THE BREAKOUT ROOM: A = examiner (reads the left column ONLY — the questions, in order), B = candidate (sees the task column; Core may use the help column), C = observer (ticks the feedback checklist). 1 minute preparation, about 3 minutes speaking, 1 minute feedback, then rotate.
 Task ! is the unexpected question: in the exam the candidate has not seen it — the examiner should read it without warning.
@@ -707,7 +711,11 @@
           <a:lstStyle/>
           <a:p>
             <a:r>
-              <a:rPr lang="en-US" dirty="0"/>
+              <a:rPr lang="ar-SA" dirty="0">
+                <a:latin typeface="Amiri" pitchFamily="2" charset="-78"/>
+                <a:ea typeface="Amiri" pitchFamily="2" charset="-78"/>
+                <a:cs typeface="Amiri" pitchFamily="2" charset="-78"/>
+              </a:rPr>
               <a:t>ROLE PLAY D (Stretch) — a youth conference panel.
 SET-UP IN THE BREAKOUT ROOM: A = examiner (reads the left column ONLY — the questions, in order), B = candidate (sees the task column; Core may use the help column), C = observer (ticks the feedback checklist). 1 minute preparation, about 3 minutes speaking, 1 minute feedback, then rotate.
 Task ! is the unexpected question: in the exam the candidate has not seen it — the examiner should read it without warning.
@@ -1243,7 +1251,11 @@
           <a:lstStyle/>
           <a:p>
             <a:r>
-              <a:rPr lang="en-US" dirty="0"/>
+              <a:rPr lang="ar-SA" dirty="0">
+                <a:latin typeface="Amiri" pitchFamily="2" charset="-78"/>
+                <a:ea typeface="Amiri" pitchFamily="2" charset="-78"/>
+                <a:cs typeface="Amiri" pitchFamily="2" charset="-78"/>
+              </a:rPr>
               <a:t>TOPIC CONVERSATION — Core. Examiner asks the questions in order and may add “لِمَاذَا؟ / هَلْ يُمْكِنُ أَنْ تَشْرَحَ أَكْثَرَ؟” to push for more. Candidate aims for one full sentence per question.
 </a:t>
             </a:r>
@@ -1332,7 +1344,11 @@
           <a:lstStyle/>
           <a:p>
             <a:r>
-              <a:rPr lang="en-US" dirty="0"/>
+              <a:rPr lang="ar-SA" dirty="0">
+                <a:latin typeface="Amiri" pitchFamily="2" charset="-78"/>
+                <a:ea typeface="Amiri" pitchFamily="2" charset="-78"/>
+                <a:cs typeface="Amiri" pitchFamily="2" charset="-78"/>
+              </a:rPr>
               <a:t>TOPIC CONVERSATION — Develop. Examiner asks the questions in order and may add “لِمَاذَا؟ / هَلْ يُمْكِنُ أَنْ تَشْرَحَ أَكْثَرَ؟” to push for more. Candidate aims for two or three sentences, with a cause and a result.
 </a:t>
             </a:r>
@@ -1421,7 +1437,11 @@
           <a:lstStyle/>
           <a:p>
             <a:r>
-              <a:rPr lang="en-US" dirty="0"/>
+              <a:rPr lang="ar-SA" dirty="0">
+                <a:latin typeface="Amiri" pitchFamily="2" charset="-78"/>
+                <a:ea typeface="Amiri" pitchFamily="2" charset="-78"/>
+                <a:cs typeface="Amiri" pitchFamily="2" charset="-78"/>
+              </a:rPr>
               <a:t>TOPIC CONVERSATION — Stretch. Examiner asks the questions in order and may add “لِمَاذَا؟ / هَلْ يُمْكِنُ أَنْ تَشْرَحَ أَكْثَرَ؟” to push for more. Candidate aims for a developed answer: opinion, balance, concession and a conditional.
 </a:t>
             </a:r>
@@ -1510,7 +1530,11 @@
           <a:lstStyle/>
           <a:p>
             <a:r>
-              <a:rPr lang="en-US" dirty="0"/>
+              <a:rPr lang="ar-SA" dirty="0">
+                <a:latin typeface="Amiri" pitchFamily="2" charset="-78"/>
+                <a:ea typeface="Amiri" pitchFamily="2" charset="-78"/>
+                <a:cs typeface="Amiri" pitchFamily="2" charset="-78"/>
+              </a:rPr>
               <a:t>WELCOME (1 min) — while students join.
 • Greet each student by name as they arrive: السَّلَامُ عَلَيْكُمْ. Take the register (Pastoral Tracker: attendance 0/1).
 • 2-MINUTE CHECK-IN (SEND training): a private chat to any student who seemed unsettled last lesson — “Are you okay today? 👍 / 👎”.
@@ -2224,7 +2248,11 @@
           <a:lstStyle/>
           <a:p>
             <a:r>
-              <a:rPr lang="en-US" dirty="0"/>
+              <a:rPr lang="ar-SA" dirty="0">
+                <a:latin typeface="Amiri" pitchFamily="2" charset="-78"/>
+                <a:ea typeface="Amiri" pitchFamily="2" charset="-78"/>
+                <a:cs typeface="Amiri" pitchFamily="2" charset="-78"/>
+              </a:rPr>
               <a:t>TEACH (3 min). Role play = precise and complete; conversation = develop. Choral repetition of the repair phrases. To a girl: تُعِيدِي.</a:t>
             </a:r>
             <a:endParaRPr lang="en-US" dirty="0"/>
@@ -2312,7 +2340,11 @@
           <a:lstStyle/>
           <a:p>
             <a:r>
-              <a:rPr lang="en-US" dirty="0"/>
+              <a:rPr lang="ar-SA" dirty="0">
+                <a:latin typeface="Amiri" pitchFamily="2" charset="-78"/>
+                <a:ea typeface="Amiri" pitchFamily="2" charset="-78"/>
+                <a:cs typeface="Amiri" pitchFamily="2" charset="-78"/>
+              </a:rPr>
               <a:t>LANGUAGE BANK (2 min) — past experience: زُرْتُ · قَضَيْتُ · أَقَمْتُ عِنْدَ; habits on the trip: كُنْتُ أَسْتَيْقِظُ …; future: سَأُسَافِرُ · آمُلُ أَنْ أَزُورَ. One trip, three tenses.</a:t>
             </a:r>
             <a:endParaRPr lang="en-US" dirty="0"/>
@@ -2400,7 +2432,11 @@
           <a:lstStyle/>
           <a:p>
             <a:r>
-              <a:rPr lang="en-US" dirty="0"/>
+              <a:rPr lang="ar-SA" dirty="0">
+                <a:latin typeface="Amiri" pitchFamily="2" charset="-78"/>
+                <a:ea typeface="Amiri" pitchFamily="2" charset="-78"/>
+                <a:cs typeface="Amiri" pitchFamily="2" charset="-78"/>
+              </a:rPr>
               <a:t>LANGUAGE BANK (2 min) — bi-sababi + NOUN (بِسَبَبِ الزِّحَامِ); li-anna + SENTENCE (لِأَنَّ الطَّرِيقَ مُزْدَحِمٌ). Result: لِذٰلِكَ · مِمَّا جَعَلَنِي · نَتِيجَةً لِذٰلِكَ. Target: one cause and one result in each developed answer.</a:t>
             </a:r>
             <a:endParaRPr lang="en-US" dirty="0"/>
@@ -2576,7 +2612,11 @@
           <a:lstStyle/>
           <a:p>
             <a:r>
-              <a:rPr lang="en-US" dirty="0"/>
+              <a:rPr lang="ar-SA" dirty="0">
+                <a:latin typeface="Amiri" pitchFamily="2" charset="-78"/>
+                <a:ea typeface="Amiri" pitchFamily="2" charset="-78"/>
+                <a:cs typeface="Amiri" pitchFamily="2" charset="-78"/>
+              </a:rPr>
               <a:t>ROLE PLAY A (Core) — arriving at a host family in Fes.
 SET-UP IN THE BREAKOUT ROOM: A = examiner (reads the left column ONLY — the questions, in order), B = candidate (sees the task column; Core may use the help column), C = observer (ticks the feedback checklist). 1 minute preparation, about 3 minutes speaking, 1 minute feedback, then rotate.
 Task ! is the unexpected question: in the exam the candidate has not seen it — the examiner should read it without warning.
@@ -2668,7 +2708,11 @@
           <a:lstStyle/>
           <a:p>
             <a:r>
-              <a:rPr lang="en-US" dirty="0"/>
+              <a:rPr lang="ar-SA" dirty="0">
+                <a:latin typeface="Amiri" pitchFamily="2" charset="-78"/>
+                <a:ea typeface="Amiri" pitchFamily="2" charset="-78"/>
+                <a:cs typeface="Amiri" pitchFamily="2" charset="-78"/>
+              </a:rPr>
               <a:t>ROLE PLAY B (Core+) — the school exchange office.
 SET-UP IN THE BREAKOUT ROOM: A = examiner (reads the left column ONLY — the questions, in order), B = candidate (sees the task column; Core may use the help column), C = observer (ticks the feedback checklist). 1 minute preparation, about 3 minutes speaking, 1 minute feedback, then rotate.
 Task ! is the unexpected question: in the exam the candidate has not seen it — the examiner should read it without warning.
@@ -3156,6 +3200,7 @@
                   <a:srgbClr val="D4AF37"/>
                 </a:solidFill>
                 <a:latin typeface="Amiri" pitchFamily="2" charset="-78"/>
+                <a:ea typeface="Amiri" pitchFamily="2" charset="-78"/>
                 <a:cs typeface="Amiri" pitchFamily="2" charset="-78"/>
               </a:rPr>
               <a:t>م</a:t>
@@ -3362,6 +3407,7 @@
                   <a:srgbClr val="D4AF37"/>
                 </a:solidFill>
                 <a:latin typeface="Amiri" pitchFamily="2" charset="-78"/>
+                <a:ea typeface="Amiri" pitchFamily="2" charset="-78"/>
                 <a:cs typeface="Amiri" pitchFamily="2" charset="-78"/>
               </a:rPr>
               <a:t>وَرْشَةُ التَّحَدُّثِ — السَّفَرُ وَالتَّبَادُلُ الثَّقَافِيُّ</a:t>
@@ -3413,6 +3459,7 @@
                   <a:srgbClr val="C6D2E6"/>
                 </a:solidFill>
                 <a:latin typeface="Amiri" pitchFamily="2" charset="-78"/>
+                <a:ea typeface="Amiri" pitchFamily="2" charset="-78"/>
                 <a:cs typeface="Amiri" pitchFamily="2" charset="-78"/>
               </a:rPr>
               <a:t>لِأَنَّ</a:t>
@@ -3439,6 +3486,7 @@
                   <a:srgbClr val="C6D2E6"/>
                 </a:solidFill>
                 <a:latin typeface="Amiri" pitchFamily="2" charset="-78"/>
+                <a:ea typeface="Amiri" pitchFamily="2" charset="-78"/>
                 <a:cs typeface="Amiri" pitchFamily="2" charset="-78"/>
               </a:rPr>
               <a:t>بِسَبَبِ</a:t>
@@ -3465,6 +3513,7 @@
                   <a:srgbClr val="C6D2E6"/>
                 </a:solidFill>
                 <a:latin typeface="Amiri" pitchFamily="2" charset="-78"/>
+                <a:ea typeface="Amiri" pitchFamily="2" charset="-78"/>
                 <a:cs typeface="Amiri" pitchFamily="2" charset="-78"/>
               </a:rPr>
               <a:t>لِذٰلِكَ</a:t>
@@ -3491,6 +3540,7 @@
                   <a:srgbClr val="C6D2E6"/>
                 </a:solidFill>
                 <a:latin typeface="Amiri" pitchFamily="2" charset="-78"/>
+                <a:ea typeface="Amiri" pitchFamily="2" charset="-78"/>
                 <a:cs typeface="Amiri" pitchFamily="2" charset="-78"/>
               </a:rPr>
               <a:t>مِمَّا</a:t>
@@ -3517,6 +3567,7 @@
                   <a:srgbClr val="C6D2E6"/>
                 </a:solidFill>
                 <a:latin typeface="Amiri" pitchFamily="2" charset="-78"/>
+                <a:ea typeface="Amiri" pitchFamily="2" charset="-78"/>
                 <a:cs typeface="Amiri" pitchFamily="2" charset="-78"/>
               </a:rPr>
               <a:t>نَتِيجَةً لِذٰلِكَ</a:t>
@@ -3949,6 +4000,7 @@
                   <a:srgbClr val="D4AF37"/>
                 </a:solidFill>
                 <a:latin typeface="Amiri" pitchFamily="2" charset="-78"/>
+                <a:ea typeface="Amiri" pitchFamily="2" charset="-78"/>
                 <a:cs typeface="Amiri" pitchFamily="2" charset="-78"/>
               </a:rPr>
               <a:t>م</a:t>
@@ -4269,6 +4321,7 @@
                   <a:srgbClr val="8A6D1E"/>
                 </a:solidFill>
                 <a:latin typeface="Amiri" pitchFamily="2" charset="-78"/>
+                <a:ea typeface="Amiri" pitchFamily="2" charset="-78"/>
                 <a:cs typeface="Amiri" pitchFamily="2" charset="-78"/>
               </a:rPr>
               <a:t>بَعْدَ التَّبَادُلِ</a:t>
@@ -4549,6 +4602,7 @@
                   <a:srgbClr val="1B3B6F"/>
                 </a:solidFill>
                 <a:latin typeface="Amiri" pitchFamily="2" charset="-78"/>
+                <a:ea typeface="Amiri" pitchFamily="2" charset="-78"/>
                 <a:cs typeface="Amiri" pitchFamily="2" charset="-78"/>
               </a:rPr>
               <a:t>كُنْتُ أَسْتَيْقِظُ … وَكُنْتُ …</a:t>
@@ -4625,6 +4679,7 @@
                   <a:srgbClr val="1B3B6F"/>
                 </a:solidFill>
                 <a:latin typeface="Amiri" pitchFamily="2" charset="-78"/>
+                <a:ea typeface="Amiri" pitchFamily="2" charset="-78"/>
                 <a:cs typeface="Amiri" pitchFamily="2" charset="-78"/>
               </a:rPr>
               <a:t>حَدِّثْنِي عَنْ حَيَاتِكَ مَعَ العَائِلَةِ.</a:t>
@@ -4728,6 +4783,7 @@
                   <a:srgbClr val="1B3B6F"/>
                 </a:solidFill>
                 <a:latin typeface="Amiri" pitchFamily="2" charset="-78"/>
+                <a:ea typeface="Amiri" pitchFamily="2" charset="-78"/>
                 <a:cs typeface="Amiri" pitchFamily="2" charset="-78"/>
               </a:rPr>
               <a:t>لَاحَظْتُ أَنَّ … بِسَبَبِ / لِأَنَّ …</a:t>
@@ -4804,6 +4860,7 @@
                   <a:srgbClr val="1B3B6F"/>
                 </a:solidFill>
                 <a:latin typeface="Amiri" pitchFamily="2" charset="-78"/>
+                <a:ea typeface="Amiri" pitchFamily="2" charset="-78"/>
                 <a:cs typeface="Amiri" pitchFamily="2" charset="-78"/>
               </a:rPr>
               <a:t>مَا أَكْبَرُ اخْتِلَافٍ لَاحَظْتَهُ؟</a:t>
@@ -4907,6 +4964,7 @@
                   <a:srgbClr val="1B3B6F"/>
                 </a:solidFill>
                 <a:latin typeface="Amiri" pitchFamily="2" charset="-78"/>
+                <a:ea typeface="Amiri" pitchFamily="2" charset="-78"/>
                 <a:cs typeface="Amiri" pitchFamily="2" charset="-78"/>
               </a:rPr>
               <a:t>نَعَمْ، فِي … ؛ مِمَّا … ، لٰكِنَّ …</a:t>
@@ -4983,6 +5041,7 @@
                   <a:srgbClr val="1B3B6F"/>
                 </a:solidFill>
                 <a:latin typeface="Amiri" pitchFamily="2" charset="-78"/>
+                <a:ea typeface="Amiri" pitchFamily="2" charset="-78"/>
                 <a:cs typeface="Amiri" pitchFamily="2" charset="-78"/>
               </a:rPr>
               <a:t>هَلْ وَاجَهْتَ مُشْكِلَةً؟</a:t>
@@ -5086,6 +5145,7 @@
                   <a:srgbClr val="1B3B6F"/>
                 </a:solidFill>
                 <a:latin typeface="Amiri" pitchFamily="2" charset="-78"/>
+                <a:ea typeface="Amiri" pitchFamily="2" charset="-78"/>
                 <a:cs typeface="Amiri" pitchFamily="2" charset="-78"/>
               </a:rPr>
               <a:t>قَبْلَ الرِّحْلَةِ كُنْتُ … أَمَّا الآنَ فَأَتَكَلَّمُ …</a:t>
@@ -5162,6 +5222,7 @@
                   <a:srgbClr val="1B3B6F"/>
                 </a:solidFill>
                 <a:latin typeface="Amiri" pitchFamily="2" charset="-78"/>
+                <a:ea typeface="Amiri" pitchFamily="2" charset="-78"/>
                 <a:cs typeface="Amiri" pitchFamily="2" charset="-78"/>
               </a:rPr>
               <a:t>كَيْفَ غَيَّرَتْكَ هٰذِهِ التَّجْرِبَةُ؟</a:t>
@@ -5265,6 +5326,7 @@
                   <a:srgbClr val="1B3B6F"/>
                 </a:solidFill>
                 <a:latin typeface="Amiri" pitchFamily="2" charset="-78"/>
+                <a:ea typeface="Amiri" pitchFamily="2" charset="-78"/>
                 <a:cs typeface="Amiri" pitchFamily="2" charset="-78"/>
               </a:rPr>
               <a:t>نَعَمْ، سَنَتَكَلَّمُ … وَآمُلُ أَنْ …</a:t>
@@ -5341,6 +5403,7 @@
                   <a:srgbClr val="1B3B6F"/>
                 </a:solidFill>
                 <a:latin typeface="Amiri" pitchFamily="2" charset="-78"/>
+                <a:ea typeface="Amiri" pitchFamily="2" charset="-78"/>
                 <a:cs typeface="Amiri" pitchFamily="2" charset="-78"/>
               </a:rPr>
               <a:t>هَلْ سَتَبْقَى عَلَى اتِّصَالٍ بِالعَائِلَةِ؟</a:t>
@@ -5550,6 +5613,7 @@
                   <a:srgbClr val="D4AF37"/>
                 </a:solidFill>
                 <a:latin typeface="Amiri" pitchFamily="2" charset="-78"/>
+                <a:ea typeface="Amiri" pitchFamily="2" charset="-78"/>
                 <a:cs typeface="Amiri" pitchFamily="2" charset="-78"/>
               </a:rPr>
               <a:t>م</a:t>
@@ -5870,6 +5934,7 @@
                   <a:srgbClr val="8A6D1E"/>
                 </a:solidFill>
                 <a:latin typeface="Amiri" pitchFamily="2" charset="-78"/>
+                <a:ea typeface="Amiri" pitchFamily="2" charset="-78"/>
                 <a:cs typeface="Amiri" pitchFamily="2" charset="-78"/>
               </a:rPr>
               <a:t>هَلْ يَبْنِي السَّفَرُ التَّفَاهُمَ حَقًّا؟</a:t>
@@ -6150,6 +6215,7 @@
                   <a:srgbClr val="1B3B6F"/>
                 </a:solidFill>
                 <a:latin typeface="Amiri" pitchFamily="2" charset="-78"/>
+                <a:ea typeface="Amiri" pitchFamily="2" charset="-78"/>
                 <a:cs typeface="Amiri" pitchFamily="2" charset="-78"/>
               </a:rPr>
               <a:t>لَا يَكْفِي … ؛ فَالسَّائِحُ … أَمَّا مَنْ … فَيَرَى …</a:t>
@@ -6226,6 +6292,7 @@
                   <a:srgbClr val="1B3B6F"/>
                 </a:solidFill>
                 <a:latin typeface="Amiri" pitchFamily="2" charset="-78"/>
+                <a:ea typeface="Amiri" pitchFamily="2" charset="-78"/>
                 <a:cs typeface="Amiri" pitchFamily="2" charset="-78"/>
               </a:rPr>
               <a:t>هَلْ يَكْفِي السَّفَرُ لِنَفْهَمَ الشُّعُوبَ الأُخْرَى؟</a:t>
@@ -6329,6 +6396,7 @@
                   <a:srgbClr val="1B3B6F"/>
                 </a:solidFill>
                 <a:latin typeface="Amiri" pitchFamily="2" charset="-78"/>
+                <a:ea typeface="Amiri" pitchFamily="2" charset="-78"/>
                 <a:cs typeface="Amiri" pitchFamily="2" charset="-78"/>
               </a:rPr>
               <a:t>كُنْتُ أَظُنُّ أَنَّ … ، لٰكِنَّنِي عِنْدَمَا … اكْتَشَفْتُ …</a:t>
@@ -6405,6 +6473,7 @@
                   <a:srgbClr val="1B3B6F"/>
                 </a:solidFill>
                 <a:latin typeface="Amiri" pitchFamily="2" charset="-78"/>
+                <a:ea typeface="Amiri" pitchFamily="2" charset="-78"/>
                 <a:cs typeface="Amiri" pitchFamily="2" charset="-78"/>
               </a:rPr>
               <a:t>أَعْطِنَا مِثَالًا مِنْ تَجْرِبَتِكَ.</a:t>
@@ -6508,6 +6577,7 @@
                   <a:srgbClr val="1B3B6F"/>
                 </a:solidFill>
                 <a:latin typeface="Amiri" pitchFamily="2" charset="-78"/>
+                <a:ea typeface="Amiri" pitchFamily="2" charset="-78"/>
                 <a:cs typeface="Amiri" pitchFamily="2" charset="-78"/>
               </a:rPr>
               <a:t>صَحِيحٌ أَنَّ … غَيْرَ أَنَّ … ؛ لِذٰلِكَ أَقْتَرِحُ …</a:t>
@@ -6584,6 +6654,7 @@
                   <a:srgbClr val="1B3B6F"/>
                 </a:solidFill>
                 <a:latin typeface="Amiri" pitchFamily="2" charset="-78"/>
+                <a:ea typeface="Amiri" pitchFamily="2" charset="-78"/>
                 <a:cs typeface="Amiri" pitchFamily="2" charset="-78"/>
               </a:rPr>
               <a:t>لٰكِنَّ السَّفَرَ مُكْلِفٌ وَيَضُرُّ البِيئَةَ.</a:t>
@@ -6687,6 +6758,7 @@
                   <a:srgbClr val="1B3B6F"/>
                 </a:solidFill>
                 <a:latin typeface="Amiri" pitchFamily="2" charset="-78"/>
+                <a:ea typeface="Amiri" pitchFamily="2" charset="-78"/>
                 <a:cs typeface="Amiri" pitchFamily="2" charset="-78"/>
               </a:rPr>
               <a:t>يَجِبُ عَلَى المُسَافِرِ أَنْ … ؛ لِأَنَّ … مِمَّا …</a:t>
@@ -6763,6 +6835,7 @@
                   <a:srgbClr val="1B3B6F"/>
                 </a:solidFill>
                 <a:latin typeface="Amiri" pitchFamily="2" charset="-78"/>
+                <a:ea typeface="Amiri" pitchFamily="2" charset="-78"/>
                 <a:cs typeface="Amiri" pitchFamily="2" charset="-78"/>
               </a:rPr>
               <a:t>وَمَا مَسْؤُولِيَّةُ المُسَافِرِ؟</a:t>
@@ -6866,6 +6939,7 @@
                   <a:srgbClr val="1B3B6F"/>
                 </a:solidFill>
                 <a:latin typeface="Amiri" pitchFamily="2" charset="-78"/>
+                <a:ea typeface="Amiri" pitchFamily="2" charset="-78"/>
                 <a:cs typeface="Amiri" pitchFamily="2" charset="-78"/>
               </a:rPr>
               <a:t>لَوِ اسْتَطَعْتُ، لَاخْتَرْتُ … لِأَنَّ …</a:t>
@@ -6945,6 +7019,7 @@
                   <a:srgbClr val="1B3B6F"/>
                 </a:solidFill>
                 <a:latin typeface="Amiri" pitchFamily="2" charset="-78"/>
+                <a:ea typeface="Amiri" pitchFamily="2" charset="-78"/>
                 <a:cs typeface="Amiri" pitchFamily="2" charset="-78"/>
               </a:rPr>
               <a:t>لَوْ اسْتَطَعْتَ أَنْ تُرْسِلَ كُلَّ طَالِبٍ فِي بَرِيطَانْيَا إِلَى بَلَدٍ وَاحِدٍ، فَأَيُّ بَلَدٍ تَخْتَارُ؟</a:t>
@@ -7154,6 +7229,7 @@
                   <a:srgbClr val="D4AF37"/>
                 </a:solidFill>
                 <a:latin typeface="Amiri" pitchFamily="2" charset="-78"/>
+                <a:ea typeface="Amiri" pitchFamily="2" charset="-78"/>
                 <a:cs typeface="Amiri" pitchFamily="2" charset="-78"/>
               </a:rPr>
               <a:t>م</a:t>
@@ -7474,6 +7550,7 @@
                   <a:srgbClr val="8A6D1E"/>
                 </a:solidFill>
                 <a:latin typeface="Amiri" pitchFamily="2" charset="-78"/>
+                <a:ea typeface="Amiri" pitchFamily="2" charset="-78"/>
                 <a:cs typeface="Amiri" pitchFamily="2" charset="-78"/>
               </a:rPr>
               <a:t>وَرَقَةُ المُلَاحِظِ</a:t>
@@ -8944,6 +9021,7 @@
                   <a:srgbClr val="D4AF37"/>
                 </a:solidFill>
                 <a:latin typeface="Amiri" pitchFamily="2" charset="-78"/>
+                <a:ea typeface="Amiri" pitchFamily="2" charset="-78"/>
                 <a:cs typeface="Amiri" pitchFamily="2" charset="-78"/>
               </a:rPr>
               <a:t>م</a:t>
@@ -9264,6 +9342,7 @@
                   <a:srgbClr val="8A6D1E"/>
                 </a:solidFill>
                 <a:latin typeface="Amiri" pitchFamily="2" charset="-78"/>
+                <a:ea typeface="Amiri" pitchFamily="2" charset="-78"/>
                 <a:cs typeface="Amiri" pitchFamily="2" charset="-78"/>
               </a:rPr>
               <a:t>نَمُوذَجُ الإِجَابَةِ</a:t>
@@ -9506,6 +9585,7 @@
                   <a:srgbClr val="1B3B6F"/>
                 </a:solidFill>
                 <a:latin typeface="Amiri" pitchFamily="2" charset="-78"/>
+                <a:ea typeface="Amiri" pitchFamily="2" charset="-78"/>
                 <a:cs typeface="Amiri" pitchFamily="2" charset="-78"/>
               </a:rPr>
               <a:t>كَانَتِ الرِّحْلَةُ طَوِيلَةً، لٰكِنَّهَا مُرِيحَةٌ.</a:t>
@@ -9582,6 +9662,7 @@
                   <a:srgbClr val="1B3B6F"/>
                 </a:solidFill>
                 <a:latin typeface="Amiri" pitchFamily="2" charset="-78"/>
+                <a:ea typeface="Amiri" pitchFamily="2" charset="-78"/>
                 <a:cs typeface="Amiri" pitchFamily="2" charset="-78"/>
               </a:rPr>
               <a:t>أَهْلًا وَسَهْلًا فِي فَاسَ! كَيْفَ كَانَتِ الرِّحْلَةُ؟</a:t>
@@ -9685,6 +9766,7 @@
                   <a:srgbClr val="1B3B6F"/>
                 </a:solidFill>
                 <a:latin typeface="Amiri" pitchFamily="2" charset="-78"/>
+                <a:ea typeface="Amiri" pitchFamily="2" charset="-78"/>
                 <a:cs typeface="Amiri" pitchFamily="2" charset="-78"/>
               </a:rPr>
               <a:t>سَافَرْتُ بِالطَّائِرَةِ إِلَى مُرَّاكُشَ، ثُمَّ بِالقِطَارِ إِلَى فَاسَ.</a:t>
@@ -9761,6 +9843,7 @@
                   <a:srgbClr val="1B3B6F"/>
                 </a:solidFill>
                 <a:latin typeface="Amiri" pitchFamily="2" charset="-78"/>
+                <a:ea typeface="Amiri" pitchFamily="2" charset="-78"/>
                 <a:cs typeface="Amiri" pitchFamily="2" charset="-78"/>
               </a:rPr>
               <a:t>كَيْفَ جِئْتَ؟</a:t>
@@ -9864,6 +9947,7 @@
                   <a:srgbClr val="1B3B6F"/>
                 </a:solidFill>
                 <a:latin typeface="Amiri" pitchFamily="2" charset="-78"/>
+                <a:ea typeface="Amiri" pitchFamily="2" charset="-78"/>
                 <a:cs typeface="Amiri" pitchFamily="2" charset="-78"/>
               </a:rPr>
               <a:t>شُكْرًا جَزِيلًا، الغُرْفَةُ جَمِيلَةٌ وَوَاسِعَةٌ.</a:t>
@@ -9940,6 +10024,7 @@
                   <a:srgbClr val="1B3B6F"/>
                 </a:solidFill>
                 <a:latin typeface="Amiri" pitchFamily="2" charset="-78"/>
+                <a:ea typeface="Amiri" pitchFamily="2" charset="-78"/>
                 <a:cs typeface="Amiri" pitchFamily="2" charset="-78"/>
               </a:rPr>
               <a:t>هٰذِهِ غُرْفَتُكَ. هَلْ تُعْجِبُكَ؟</a:t>
@@ -10043,6 +10128,7 @@
                   <a:srgbClr val="1B3B6F"/>
                 </a:solidFill>
                 <a:latin typeface="Amiri" pitchFamily="2" charset="-78"/>
+                <a:ea typeface="Amiri" pitchFamily="2" charset="-78"/>
                 <a:cs typeface="Amiri" pitchFamily="2" charset="-78"/>
               </a:rPr>
               <a:t>وَمَتَى نَتَنَاوَلُ الفُطُورَ؟</a:t>
@@ -10119,6 +10205,7 @@
                   <a:srgbClr val="1B3B6F"/>
                 </a:solidFill>
                 <a:latin typeface="Amiri" pitchFamily="2" charset="-78"/>
+                <a:ea typeface="Amiri" pitchFamily="2" charset="-78"/>
                 <a:cs typeface="Amiri" pitchFamily="2" charset="-78"/>
               </a:rPr>
               <a:t>نَتَعَشَّى فِي السَّاعَةِ التَّاسِعَةِ.</a:t>
@@ -10222,6 +10309,7 @@
                   <a:srgbClr val="1B3B6F"/>
                 </a:solidFill>
                 <a:latin typeface="Amiri" pitchFamily="2" charset="-78"/>
+                <a:ea typeface="Amiri" pitchFamily="2" charset="-78"/>
                 <a:cs typeface="Amiri" pitchFamily="2" charset="-78"/>
               </a:rPr>
               <a:t>أُرِيدُ أَنْ أَزُورَ المَدِينَةَ القَدِيمَةَ، لِأَنَّهَا مَشْهُورَةٌ جِدًّا.</a:t>
@@ -10298,6 +10386,7 @@
                   <a:srgbClr val="1B3B6F"/>
                 </a:solidFill>
                 <a:latin typeface="Amiri" pitchFamily="2" charset="-78"/>
+                <a:ea typeface="Amiri" pitchFamily="2" charset="-78"/>
                 <a:cs typeface="Amiri" pitchFamily="2" charset="-78"/>
               </a:rPr>
               <a:t>فِي السَّابِعَةِ. مَاذَا تُرِيدُ أَنْ تَرَى فِي فَاسَ؟</a:t>
@@ -10507,6 +10596,7 @@
                   <a:srgbClr val="D4AF37"/>
                 </a:solidFill>
                 <a:latin typeface="Amiri" pitchFamily="2" charset="-78"/>
+                <a:ea typeface="Amiri" pitchFamily="2" charset="-78"/>
                 <a:cs typeface="Amiri" pitchFamily="2" charset="-78"/>
               </a:rPr>
               <a:t>م</a:t>
@@ -10827,6 +10917,7 @@
                   <a:srgbClr val="8A6D1E"/>
                 </a:solidFill>
                 <a:latin typeface="Amiri" pitchFamily="2" charset="-78"/>
+                <a:ea typeface="Amiri" pitchFamily="2" charset="-78"/>
                 <a:cs typeface="Amiri" pitchFamily="2" charset="-78"/>
               </a:rPr>
               <a:t>نَمُوذَجُ الإِجَابَةِ</a:t>
@@ -11069,6 +11160,7 @@
                   <a:srgbClr val="1B3B6F"/>
                 </a:solidFill>
                 <a:latin typeface="Amiri" pitchFamily="2" charset="-78"/>
+                <a:ea typeface="Amiri" pitchFamily="2" charset="-78"/>
                 <a:cs typeface="Amiri" pitchFamily="2" charset="-78"/>
               </a:rPr>
               <a:t>لِأَنِّي أُرِيدُ أَنْ أُحَسِّنَ لُغَتِيَ العَرَبِيَّةَ.</a:t>
@@ -11145,6 +11237,7 @@
                   <a:srgbClr val="1B3B6F"/>
                 </a:solidFill>
                 <a:latin typeface="Amiri" pitchFamily="2" charset="-78"/>
+                <a:ea typeface="Amiri" pitchFamily="2" charset="-78"/>
                 <a:cs typeface="Amiri" pitchFamily="2" charset="-78"/>
               </a:rPr>
               <a:t>لِمَاذَا تُرِيدُ أَنْ تُشَارِكَ فِي التَّبَادُلِ؟</a:t>
@@ -11248,6 +11341,7 @@
                   <a:srgbClr val="1B3B6F"/>
                 </a:solidFill>
                 <a:latin typeface="Amiri" pitchFamily="2" charset="-78"/>
+                <a:ea typeface="Amiri" pitchFamily="2" charset="-78"/>
                 <a:cs typeface="Amiri" pitchFamily="2" charset="-78"/>
               </a:rPr>
               <a:t>نَعَمْ، زُرْتُ مِصْرَ مَعَ أُسْرَتِي فِي الصَّيْفِ المَاضِي.</a:t>
@@ -11324,6 +11418,7 @@
                   <a:srgbClr val="1B3B6F"/>
                 </a:solidFill>
                 <a:latin typeface="Amiri" pitchFamily="2" charset="-78"/>
+                <a:ea typeface="Amiri" pitchFamily="2" charset="-78"/>
                 <a:cs typeface="Amiri" pitchFamily="2" charset="-78"/>
               </a:rPr>
               <a:t>هَلْ سَافَرْتَ إِلَى بَلَدٍ عَرَبِيٍّ مِنْ قَبْلُ؟</a:t>
@@ -11427,6 +11522,7 @@
                   <a:srgbClr val="1B3B6F"/>
                 </a:solidFill>
                 <a:latin typeface="Amiri" pitchFamily="2" charset="-78"/>
+                <a:ea typeface="Amiri" pitchFamily="2" charset="-78"/>
                 <a:cs typeface="Amiri" pitchFamily="2" charset="-78"/>
               </a:rPr>
               <a:t>تَعَلَّمْتُ أَنَّ اللَّهَجَاتِ مُخْتَلِفَةٌ جِدًّا؛ لِذٰلِكَ أُرِيدُ أَنْ أَعِيشَ مَعَ عَائِلَةٍ هَذِهِ المَرَّةَ.</a:t>
@@ -11503,6 +11599,7 @@
                   <a:srgbClr val="1B3B6F"/>
                 </a:solidFill>
                 <a:latin typeface="Amiri" pitchFamily="2" charset="-78"/>
+                <a:ea typeface="Amiri" pitchFamily="2" charset="-78"/>
                 <a:cs typeface="Amiri" pitchFamily="2" charset="-78"/>
               </a:rPr>
               <a:t>مَاذَا تَعَلَّمْتَ مِنْ تِلْكَ الرِّحْلَةِ؟</a:t>
@@ -11606,6 +11703,7 @@
                   <a:srgbClr val="1B3B6F"/>
                 </a:solidFill>
                 <a:latin typeface="Amiri" pitchFamily="2" charset="-78"/>
+                <a:ea typeface="Amiri" pitchFamily="2" charset="-78"/>
                 <a:cs typeface="Amiri" pitchFamily="2" charset="-78"/>
               </a:rPr>
               <a:t>هَلْ سَأَذْهَبُ إِلَى مَدْرَسَةٍ هُنَاكَ؟ وَكَيْفَ سَأَتَنَقَّلُ فِي المَدِينَةِ؟</a:t>
@@ -11682,6 +11780,7 @@
                   <a:srgbClr val="1B3B6F"/>
                 </a:solidFill>
                 <a:latin typeface="Amiri" pitchFamily="2" charset="-78"/>
+                <a:ea typeface="Amiri" pitchFamily="2" charset="-78"/>
                 <a:cs typeface="Amiri" pitchFamily="2" charset="-78"/>
               </a:rPr>
               <a:t>سَتَسْكُنُ مَعَ عَائِلَةٍ فِي عَمَّانَ ثَلَاثَةَ أَسَابِيعَ.</a:t>
@@ -11785,6 +11884,7 @@
                   <a:srgbClr val="1B3B6F"/>
                 </a:solidFill>
                 <a:latin typeface="Amiri" pitchFamily="2" charset="-78"/>
+                <a:ea typeface="Amiri" pitchFamily="2" charset="-78"/>
                 <a:cs typeface="Amiri" pitchFamily="2" charset="-78"/>
               </a:rPr>
               <a:t>أَتَوَقَّعُ صُعُوبَةً فِي الفَهْمِ بِسَبَبِ سُرْعَةِ الكَلَامِ، لِذٰلِكَ سَأَطْلُبُ مِنْهُمْ أَنْ يَتَكَلَّمُوا بِبُطْءٍ.</a:t>
@@ -11861,6 +11961,7 @@
                   <a:srgbClr val="1B3B6F"/>
                 </a:solidFill>
                 <a:latin typeface="Amiri" pitchFamily="2" charset="-78"/>
+                <a:ea typeface="Amiri" pitchFamily="2" charset="-78"/>
                 <a:cs typeface="Amiri" pitchFamily="2" charset="-78"/>
               </a:rPr>
               <a:t>نَعَمْ، وَبِالحَافِلَةِ. مَا الصُّعُوبَةُ الَّتِي تَتَوَقَّعُهَا؟</a:t>
@@ -12070,6 +12171,7 @@
                   <a:srgbClr val="D4AF37"/>
                 </a:solidFill>
                 <a:latin typeface="Amiri" pitchFamily="2" charset="-78"/>
+                <a:ea typeface="Amiri" pitchFamily="2" charset="-78"/>
                 <a:cs typeface="Amiri" pitchFamily="2" charset="-78"/>
               </a:rPr>
               <a:t>م</a:t>
@@ -12390,6 +12492,7 @@
                   <a:srgbClr val="8A6D1E"/>
                 </a:solidFill>
                 <a:latin typeface="Amiri" pitchFamily="2" charset="-78"/>
+                <a:ea typeface="Amiri" pitchFamily="2" charset="-78"/>
                 <a:cs typeface="Amiri" pitchFamily="2" charset="-78"/>
               </a:rPr>
               <a:t>نَمُوذَجُ الإِجَابَةِ</a:t>
@@ -12632,6 +12735,7 @@
                   <a:srgbClr val="1B3B6F"/>
                 </a:solidFill>
                 <a:latin typeface="Amiri" pitchFamily="2" charset="-78"/>
+                <a:ea typeface="Amiri" pitchFamily="2" charset="-78"/>
                 <a:cs typeface="Amiri" pitchFamily="2" charset="-78"/>
               </a:rPr>
               <a:t>كُنْتُ أَسْتَيْقِظُ عَلَى صَوْتِ الأَذَانِ، وَأَذْهَبُ إِلَى المَدْرَسَةِ مَعَ ابْنِ العَائِلَةِ، وَفِي المَسَاءِ كُنَّا نَزُورُ الأَقَارِبَ.</a:t>
@@ -12708,6 +12812,7 @@
                   <a:srgbClr val="1B3B6F"/>
                 </a:solidFill>
                 <a:latin typeface="Amiri" pitchFamily="2" charset="-78"/>
+                <a:ea typeface="Amiri" pitchFamily="2" charset="-78"/>
                 <a:cs typeface="Amiri" pitchFamily="2" charset="-78"/>
               </a:rPr>
               <a:t>حَدِّثْنِي عَنْ حَيَاتِكَ مَعَ العَائِلَةِ.</a:t>
@@ -12811,6 +12916,7 @@
                   <a:srgbClr val="1B3B6F"/>
                 </a:solidFill>
                 <a:latin typeface="Amiri" pitchFamily="2" charset="-78"/>
+                <a:ea typeface="Amiri" pitchFamily="2" charset="-78"/>
                 <a:cs typeface="Amiri" pitchFamily="2" charset="-78"/>
               </a:rPr>
               <a:t>لَاحَظْتُ أَنَّ النَّاسَ يَسْهَرُونَ أَكْثَرَ مِنَّا، لِأَنَّ الجَوَّ حَارٌّ فِي النَّهَارِ، فَتَبْدَأُ الحَيَاةُ الاجْتِمَاعِيَّةُ بَعْدَ الغُرُوبِ.</a:t>
@@ -12887,6 +12993,7 @@
                   <a:srgbClr val="1B3B6F"/>
                 </a:solidFill>
                 <a:latin typeface="Amiri" pitchFamily="2" charset="-78"/>
+                <a:ea typeface="Amiri" pitchFamily="2" charset="-78"/>
                 <a:cs typeface="Amiri" pitchFamily="2" charset="-78"/>
               </a:rPr>
               <a:t>مَا أَكْبَرُ اخْتِلَافٍ لَاحَظْتَهُ؟</a:t>
@@ -12990,6 +13097,7 @@
                   <a:srgbClr val="1B3B6F"/>
                 </a:solidFill>
                 <a:latin typeface="Amiri" pitchFamily="2" charset="-78"/>
+                <a:ea typeface="Amiri" pitchFamily="2" charset="-78"/>
                 <a:cs typeface="Amiri" pitchFamily="2" charset="-78"/>
               </a:rPr>
               <a:t>نَعَمْ، فِي الأُسْبُوعِ الأَوَّلِ رَكِبْتُ الحَافِلَةَ الخَطَأَ، مِمَّا جَعَلَنِي أَتَأَخَّرُ سَاعَةً، لٰكِنَّ سَائِقًا لَطِيفًا أَوْصَلَنِي إِلَى البَيْتِ.</a:t>
@@ -13066,6 +13174,7 @@
                   <a:srgbClr val="1B3B6F"/>
                 </a:solidFill>
                 <a:latin typeface="Amiri" pitchFamily="2" charset="-78"/>
+                <a:ea typeface="Amiri" pitchFamily="2" charset="-78"/>
                 <a:cs typeface="Amiri" pitchFamily="2" charset="-78"/>
               </a:rPr>
               <a:t>هَلْ وَاجَهْتَ مُشْكِلَةً؟</a:t>
@@ -13169,6 +13278,7 @@
                   <a:srgbClr val="1B3B6F"/>
                 </a:solidFill>
                 <a:latin typeface="Amiri" pitchFamily="2" charset="-78"/>
+                <a:ea typeface="Amiri" pitchFamily="2" charset="-78"/>
                 <a:cs typeface="Amiri" pitchFamily="2" charset="-78"/>
               </a:rPr>
               <a:t>قَبْلَ الرِّحْلَةِ كُنْتُ أَخْجَلُ مِنَ الكَلَامِ بِالعَرَبِيَّةِ، أَمَّا الآنَ فَأَتَكَلَّمُ بِثِقَةٍ؛ نَتِيجَةً لِذٰلِكَ تَحَسَّنَتْ دَرَجَاتِي.</a:t>
@@ -13245,6 +13355,7 @@
                   <a:srgbClr val="1B3B6F"/>
                 </a:solidFill>
                 <a:latin typeface="Amiri" pitchFamily="2" charset="-78"/>
+                <a:ea typeface="Amiri" pitchFamily="2" charset="-78"/>
                 <a:cs typeface="Amiri" pitchFamily="2" charset="-78"/>
               </a:rPr>
               <a:t>كَيْفَ غَيَّرَتْكَ هٰذِهِ التَّجْرِبَةُ؟</a:t>
@@ -13348,6 +13459,7 @@
                   <a:srgbClr val="1B3B6F"/>
                 </a:solidFill>
                 <a:latin typeface="Amiri" pitchFamily="2" charset="-78"/>
+                <a:ea typeface="Amiri" pitchFamily="2" charset="-78"/>
                 <a:cs typeface="Amiri" pitchFamily="2" charset="-78"/>
               </a:rPr>
               <a:t>نَعَمْ، سَنَتَكَلَّمُ بِالفِيدْيُو كُلَّ شَهْرٍ، وَآمُلُ أَنْ يَزُورَنِي ابْنُهُمْ فِي لَنْدَنَ الصَّيْفَ القَادِمَ.</a:t>
@@ -13424,6 +13536,7 @@
                   <a:srgbClr val="1B3B6F"/>
                 </a:solidFill>
                 <a:latin typeface="Amiri" pitchFamily="2" charset="-78"/>
+                <a:ea typeface="Amiri" pitchFamily="2" charset="-78"/>
                 <a:cs typeface="Amiri" pitchFamily="2" charset="-78"/>
               </a:rPr>
               <a:t>هَلْ سَتَبْقَى عَلَى اتِّصَالٍ بِالعَائِلَةِ؟</a:t>
@@ -13633,6 +13746,7 @@
                   <a:srgbClr val="D4AF37"/>
                 </a:solidFill>
                 <a:latin typeface="Amiri" pitchFamily="2" charset="-78"/>
+                <a:ea typeface="Amiri" pitchFamily="2" charset="-78"/>
                 <a:cs typeface="Amiri" pitchFamily="2" charset="-78"/>
               </a:rPr>
               <a:t>م</a:t>
@@ -13953,6 +14067,7 @@
                   <a:srgbClr val="8A6D1E"/>
                 </a:solidFill>
                 <a:latin typeface="Amiri" pitchFamily="2" charset="-78"/>
+                <a:ea typeface="Amiri" pitchFamily="2" charset="-78"/>
                 <a:cs typeface="Amiri" pitchFamily="2" charset="-78"/>
               </a:rPr>
               <a:t>نَمُوذَجُ الإِجَابَةِ</a:t>
@@ -14195,6 +14310,7 @@
                   <a:srgbClr val="1B3B6F"/>
                 </a:solidFill>
                 <a:latin typeface="Amiri" pitchFamily="2" charset="-78"/>
+                <a:ea typeface="Amiri" pitchFamily="2" charset="-78"/>
                 <a:cs typeface="Amiri" pitchFamily="2" charset="-78"/>
               </a:rPr>
               <a:t>لَا يَكْفِي وَحْدَهُ؛ فَالسَّائِحُ الَّذِي يَبْقَى فِي فُنْدُقٍ فَخْمٍ يَرَى الوَاجِهَةَ فَقَطْ، أَمَّا مَنْ يَعِيشُ مَعَ عَائِلَةٍ فَيَرَى الحَيَاةَ الحَقِيقِيَّةَ.</a:t>
@@ -14271,6 +14387,7 @@
                   <a:srgbClr val="1B3B6F"/>
                 </a:solidFill>
                 <a:latin typeface="Amiri" pitchFamily="2" charset="-78"/>
+                <a:ea typeface="Amiri" pitchFamily="2" charset="-78"/>
                 <a:cs typeface="Amiri" pitchFamily="2" charset="-78"/>
               </a:rPr>
               <a:t>هَلْ يَكْفِي السَّفَرُ لِنَفْهَمَ الشُّعُوبَ الأُخْرَى؟</a:t>
@@ -14374,6 +14491,7 @@
                   <a:srgbClr val="1B3B6F"/>
                 </a:solidFill>
                 <a:latin typeface="Amiri" pitchFamily="2" charset="-78"/>
+                <a:ea typeface="Amiri" pitchFamily="2" charset="-78"/>
                 <a:cs typeface="Amiri" pitchFamily="2" charset="-78"/>
               </a:rPr>
               <a:t>كُنْتُ أَظُنُّ أَنَّ المُجْتَمَعَ هُنَاكَ مُغْلَقٌ، لٰكِنَّنِي عِنْدَمَا عِشْتُ مَعَ عَائِلَةٍ أُرْدُنِيَّةٍ، اكْتَشَفْتُ نِقَاشَاتٍ حُرَّةً عَلَى العَشَاءِ حَوْلَ كُلِّ شَيْءٍ.</a:t>
@@ -14450,6 +14568,7 @@
                   <a:srgbClr val="1B3B6F"/>
                 </a:solidFill>
                 <a:latin typeface="Amiri" pitchFamily="2" charset="-78"/>
+                <a:ea typeface="Amiri" pitchFamily="2" charset="-78"/>
                 <a:cs typeface="Amiri" pitchFamily="2" charset="-78"/>
               </a:rPr>
               <a:t>أَعْطِنَا مِثَالًا مِنْ تَجْرِبَتِكَ.</a:t>
@@ -14556,6 +14675,7 @@
                   <a:srgbClr val="1B3B6F"/>
                 </a:solidFill>
                 <a:latin typeface="Amiri" pitchFamily="2" charset="-78"/>
+                <a:ea typeface="Amiri" pitchFamily="2" charset="-78"/>
                 <a:cs typeface="Amiri" pitchFamily="2" charset="-78"/>
               </a:rPr>
               <a:t>صَحِيحٌ أَنَّهُ مُكْلِفٌ وَيُلَوِّثُ الجَوَّ، غَيْرَ أَنَّ التَّبَادُلَ يُمْكِنُ أَنْ يَبْدَأَ بِالإِنْتَرْنِتِ؛ لِذٰلِكَ أَقْتَرِحُ أَنْ تُرْبَطَ المَدَارِسُ بِمَدَارِسَ فِي بُلْدَانٍ أُخْرَى.</a:t>
@@ -14632,6 +14752,7 @@
                   <a:srgbClr val="1B3B6F"/>
                 </a:solidFill>
                 <a:latin typeface="Amiri" pitchFamily="2" charset="-78"/>
+                <a:ea typeface="Amiri" pitchFamily="2" charset="-78"/>
                 <a:cs typeface="Amiri" pitchFamily="2" charset="-78"/>
               </a:rPr>
               <a:t>لٰكِنَّ السَّفَرَ مُكْلِفٌ وَيَضُرُّ البِيئَةَ.</a:t>
@@ -14735,6 +14856,7 @@
                   <a:srgbClr val="1B3B6F"/>
                 </a:solidFill>
                 <a:latin typeface="Amiri" pitchFamily="2" charset="-78"/>
+                <a:ea typeface="Amiri" pitchFamily="2" charset="-78"/>
                 <a:cs typeface="Amiri" pitchFamily="2" charset="-78"/>
               </a:rPr>
               <a:t>يَجِبُ عَلَيْهِ أَنْ يَتَعَلَّمَ كَلِمَاتٍ مِنْ لُغَةِ البَلَدِ وَيَحْتَرِمَ عَادَاتِهِ، لِأَنَّ ذٰلِكَ يَفْتَحُ القُلُوبَ، مِمَّا يُحَوِّلُ الرِّحْلَةَ إِلَى صَدَاقَةٍ.</a:t>
@@ -14811,6 +14933,7 @@
                   <a:srgbClr val="1B3B6F"/>
                 </a:solidFill>
                 <a:latin typeface="Amiri" pitchFamily="2" charset="-78"/>
+                <a:ea typeface="Amiri" pitchFamily="2" charset="-78"/>
                 <a:cs typeface="Amiri" pitchFamily="2" charset="-78"/>
               </a:rPr>
               <a:t>وَمَا مَسْؤُولِيَّةُ المُسَافِرِ؟</a:t>
@@ -14914,6 +15037,7 @@
                   <a:srgbClr val="1B3B6F"/>
                 </a:solidFill>
                 <a:latin typeface="Amiri" pitchFamily="2" charset="-78"/>
+                <a:ea typeface="Amiri" pitchFamily="2" charset="-78"/>
                 <a:cs typeface="Amiri" pitchFamily="2" charset="-78"/>
               </a:rPr>
               <a:t>لَوِ اسْتَطَعْتُ، لَاخْتَرْتُ بَلَدًا يَخْتَلِفُ عَنْهُمْ كَثِيرًا، كَالمَغْرِبِ أَوِ اليَابَانِ، لِأَنَّنَا نَتَعَلَّمُ أَكْثَرَ مِمَّا يُفَاجِئُنَا.</a:t>
@@ -14993,6 +15117,7 @@
                   <a:srgbClr val="1B3B6F"/>
                 </a:solidFill>
                 <a:latin typeface="Amiri" pitchFamily="2" charset="-78"/>
+                <a:ea typeface="Amiri" pitchFamily="2" charset="-78"/>
                 <a:cs typeface="Amiri" pitchFamily="2" charset="-78"/>
               </a:rPr>
               <a:t>لَوْ اسْتَطَعْتَ أَنْ تُرْسِلَ كُلَّ طَالِبٍ فِي بَرِيطَانْيَا إِلَى بَلَدٍ وَاحِدٍ، فَأَيُّ بَلَدٍ تَخْتَارُ؟</a:t>
@@ -15202,6 +15327,7 @@
                   <a:srgbClr val="D4AF37"/>
                 </a:solidFill>
                 <a:latin typeface="Amiri" pitchFamily="2" charset="-78"/>
+                <a:ea typeface="Amiri" pitchFamily="2" charset="-78"/>
                 <a:cs typeface="Amiri" pitchFamily="2" charset="-78"/>
               </a:rPr>
               <a:t>م</a:t>
@@ -15522,6 +15648,7 @@
                   <a:srgbClr val="8A6D1E"/>
                 </a:solidFill>
                 <a:latin typeface="Amiri" pitchFamily="2" charset="-78"/>
+                <a:ea typeface="Amiri" pitchFamily="2" charset="-78"/>
                 <a:cs typeface="Amiri" pitchFamily="2" charset="-78"/>
               </a:rPr>
               <a:t>السَّفَرُ وَالرِّحْلَاتُ</a:t>
@@ -15802,6 +15929,7 @@
                   <a:srgbClr val="1B3B6F"/>
                 </a:solidFill>
                 <a:latin typeface="Amiri" pitchFamily="2" charset="-78"/>
+                <a:ea typeface="Amiri" pitchFamily="2" charset="-78"/>
                 <a:cs typeface="Amiri" pitchFamily="2" charset="-78"/>
               </a:rPr>
               <a:t>سَافَرْتُ إِلَى …</a:t>
@@ -15878,6 +16006,7 @@
                   <a:srgbClr val="1B3B6F"/>
                 </a:solidFill>
                 <a:latin typeface="Amiri" pitchFamily="2" charset="-78"/>
+                <a:ea typeface="Amiri" pitchFamily="2" charset="-78"/>
                 <a:cs typeface="Amiri" pitchFamily="2" charset="-78"/>
               </a:rPr>
               <a:t>إِلَى أَيْنَ سَافَرْتَ آخِرَ مَرَّةٍ؟</a:t>
@@ -16046,6 +16175,7 @@
                   <a:srgbClr val="1B3B6F"/>
                 </a:solidFill>
                 <a:latin typeface="Amiri" pitchFamily="2" charset="-78"/>
+                <a:ea typeface="Amiri" pitchFamily="2" charset="-78"/>
                 <a:cs typeface="Amiri" pitchFamily="2" charset="-78"/>
               </a:rPr>
               <a:t>سَافَرْتُ مَعَ …</a:t>
@@ -16122,6 +16252,7 @@
                   <a:srgbClr val="1B3B6F"/>
                 </a:solidFill>
                 <a:latin typeface="Amiri" pitchFamily="2" charset="-78"/>
+                <a:ea typeface="Amiri" pitchFamily="2" charset="-78"/>
                 <a:cs typeface="Amiri" pitchFamily="2" charset="-78"/>
               </a:rPr>
               <a:t>مَعَ مَنْ سَافَرْتَ؟</a:t>
@@ -16290,6 +16421,7 @@
                   <a:srgbClr val="1B3B6F"/>
                 </a:solidFill>
                 <a:latin typeface="Amiri" pitchFamily="2" charset="-78"/>
+                <a:ea typeface="Amiri" pitchFamily="2" charset="-78"/>
                 <a:cs typeface="Amiri" pitchFamily="2" charset="-78"/>
               </a:rPr>
               <a:t>نَعَمْ، أُحِبُّهُ لِأَنَّ …</a:t>
@@ -16366,6 +16498,7 @@
                   <a:srgbClr val="1B3B6F"/>
                 </a:solidFill>
                 <a:latin typeface="Amiri" pitchFamily="2" charset="-78"/>
+                <a:ea typeface="Amiri" pitchFamily="2" charset="-78"/>
                 <a:cs typeface="Amiri" pitchFamily="2" charset="-78"/>
               </a:rPr>
               <a:t>هَلْ تُحِبُّ السَّفَرَ؟ لِمَاذَا؟</a:t>
@@ -16534,6 +16667,7 @@
                   <a:srgbClr val="1B3B6F"/>
                 </a:solidFill>
                 <a:latin typeface="Amiri" pitchFamily="2" charset="-78"/>
+                <a:ea typeface="Amiri" pitchFamily="2" charset="-78"/>
                 <a:cs typeface="Amiri" pitchFamily="2" charset="-78"/>
               </a:rPr>
               <a:t>أُرِيدُ أَنْ أَزُورَ …</a:t>
@@ -16610,6 +16744,7 @@
                   <a:srgbClr val="1B3B6F"/>
                 </a:solidFill>
                 <a:latin typeface="Amiri" pitchFamily="2" charset="-78"/>
+                <a:ea typeface="Amiri" pitchFamily="2" charset="-78"/>
                 <a:cs typeface="Amiri" pitchFamily="2" charset="-78"/>
               </a:rPr>
               <a:t>مَا البَلَدُ الَّذِي تُرِيدُ أَنْ تَزُورَهُ؟</a:t>
@@ -16778,6 +16913,7 @@
                   <a:srgbClr val="1B3B6F"/>
                 </a:solidFill>
                 <a:latin typeface="Amiri" pitchFamily="2" charset="-78"/>
+                <a:ea typeface="Amiri" pitchFamily="2" charset="-78"/>
                 <a:cs typeface="Amiri" pitchFamily="2" charset="-78"/>
               </a:rPr>
               <a:t>أَحْمِلُ …</a:t>
@@ -16854,6 +16990,7 @@
                   <a:srgbClr val="1B3B6F"/>
                 </a:solidFill>
                 <a:latin typeface="Amiri" pitchFamily="2" charset="-78"/>
+                <a:ea typeface="Amiri" pitchFamily="2" charset="-78"/>
                 <a:cs typeface="Amiri" pitchFamily="2" charset="-78"/>
               </a:rPr>
               <a:t>مَاذَا تَحْمِلُ فِي حَقِيبَةِ السَّفَرِ؟</a:t>
@@ -17008,6 +17145,7 @@
                   <a:srgbClr val="1B3B6F"/>
                 </a:solidFill>
                 <a:latin typeface="Amiri" pitchFamily="2" charset="-78"/>
+                <a:ea typeface="Amiri" pitchFamily="2" charset="-78"/>
                 <a:cs typeface="Amiri" pitchFamily="2" charset="-78"/>
               </a:rPr>
               <a:t>عَفْوًا، هَلْ يُمْكِنُ أَنْ تُعِيدَ السُّؤَالَ؟</a:t>
@@ -17141,6 +17279,7 @@
                   <a:srgbClr val="D4AF37"/>
                 </a:solidFill>
                 <a:latin typeface="Amiri" pitchFamily="2" charset="-78"/>
+                <a:ea typeface="Amiri" pitchFamily="2" charset="-78"/>
                 <a:cs typeface="Amiri" pitchFamily="2" charset="-78"/>
               </a:rPr>
               <a:t>م</a:t>
@@ -17461,6 +17600,7 @@
                   <a:srgbClr val="8A6D1E"/>
                 </a:solidFill>
                 <a:latin typeface="Amiri" pitchFamily="2" charset="-78"/>
+                <a:ea typeface="Amiri" pitchFamily="2" charset="-78"/>
                 <a:cs typeface="Amiri" pitchFamily="2" charset="-78"/>
               </a:rPr>
               <a:t>تَجَارِبُ السَّفَرِ</a:t>
@@ -17741,6 +17881,7 @@
                   <a:srgbClr val="1B3B6F"/>
                 </a:solidFill>
                 <a:latin typeface="Amiri" pitchFamily="2" charset="-78"/>
+                <a:ea typeface="Amiri" pitchFamily="2" charset="-78"/>
                 <a:cs typeface="Amiri" pitchFamily="2" charset="-78"/>
               </a:rPr>
               <a:t>زُرْتُ … ؛ وَكَانَ … لِأَنَّ …</a:t>
@@ -17817,6 +17958,7 @@
                   <a:srgbClr val="1B3B6F"/>
                 </a:solidFill>
                 <a:latin typeface="Amiri" pitchFamily="2" charset="-78"/>
+                <a:ea typeface="Amiri" pitchFamily="2" charset="-78"/>
                 <a:cs typeface="Amiri" pitchFamily="2" charset="-78"/>
               </a:rPr>
               <a:t>صِفْ رِحْلَةً لَا تَنْسَاهَا.</a:t>
@@ -17920,6 +18062,7 @@
                   <a:srgbClr val="1B3B6F"/>
                 </a:solidFill>
                 <a:latin typeface="Amiri" pitchFamily="2" charset="-78"/>
+                <a:ea typeface="Amiri" pitchFamily="2" charset="-78"/>
                 <a:cs typeface="Amiri" pitchFamily="2" charset="-78"/>
               </a:rPr>
               <a:t>لَاحَظْتُ أَنَّ … بِسَبَبِ …</a:t>
@@ -17996,6 +18139,7 @@
                   <a:srgbClr val="1B3B6F"/>
                 </a:solidFill>
                 <a:latin typeface="Amiri" pitchFamily="2" charset="-78"/>
+                <a:ea typeface="Amiri" pitchFamily="2" charset="-78"/>
                 <a:cs typeface="Amiri" pitchFamily="2" charset="-78"/>
               </a:rPr>
               <a:t>مَا الاخْتِلَافُ الثَّقَافِيُّ الَّذِي لَاحَظْتَهُ فِي بَلَدٍ آخَرَ؟</a:t>
@@ -18099,6 +18243,7 @@
                   <a:srgbClr val="1B3B6F"/>
                 </a:solidFill>
                 <a:latin typeface="Amiri" pitchFamily="2" charset="-78"/>
+                <a:ea typeface="Amiri" pitchFamily="2" charset="-78"/>
                 <a:cs typeface="Amiri" pitchFamily="2" charset="-78"/>
               </a:rPr>
               <a:t>نَعَمْ، … مِمَّا …</a:t>
@@ -18175,6 +18320,7 @@
                   <a:srgbClr val="1B3B6F"/>
                 </a:solidFill>
                 <a:latin typeface="Amiri" pitchFamily="2" charset="-78"/>
+                <a:ea typeface="Amiri" pitchFamily="2" charset="-78"/>
                 <a:cs typeface="Amiri" pitchFamily="2" charset="-78"/>
               </a:rPr>
               <a:t>هَلْ وَاجَهْتَ مُشْكِلَةً فِي السَّفَرِ؟</a:t>
@@ -18278,6 +18424,7 @@
                   <a:srgbClr val="1B3B6F"/>
                 </a:solidFill>
                 <a:latin typeface="Amiri" pitchFamily="2" charset="-78"/>
+                <a:ea typeface="Amiri" pitchFamily="2" charset="-78"/>
                 <a:cs typeface="Amiri" pitchFamily="2" charset="-78"/>
               </a:rPr>
               <a:t>السَّائِحُ … أَمَّا طَالِبُ التَّبَادُلِ فَيَعِيشُ …</a:t>
@@ -18354,6 +18501,7 @@
                   <a:srgbClr val="1B3B6F"/>
                 </a:solidFill>
                 <a:latin typeface="Amiri" pitchFamily="2" charset="-78"/>
+                <a:ea typeface="Amiri" pitchFamily="2" charset="-78"/>
                 <a:cs typeface="Amiri" pitchFamily="2" charset="-78"/>
               </a:rPr>
               <a:t>مَا الفَرْقُ بَيْنَ السِّيَاحَةِ وَالتَّبَادُلِ الثَّقَافِيِّ؟</a:t>
@@ -18457,6 +18605,7 @@
                   <a:srgbClr val="1B3B6F"/>
                 </a:solidFill>
                 <a:latin typeface="Amiri" pitchFamily="2" charset="-78"/>
+                <a:ea typeface="Amiri" pitchFamily="2" charset="-78"/>
                 <a:cs typeface="Amiri" pitchFamily="2" charset="-78"/>
               </a:rPr>
               <a:t>سَأُسَافِرُ / آمُلُ أَنْ … لِكَيْ …</a:t>
@@ -18533,6 +18682,7 @@
                   <a:srgbClr val="1B3B6F"/>
                 </a:solidFill>
                 <a:latin typeface="Amiri" pitchFamily="2" charset="-78"/>
+                <a:ea typeface="Amiri" pitchFamily="2" charset="-78"/>
                 <a:cs typeface="Amiri" pitchFamily="2" charset="-78"/>
               </a:rPr>
               <a:t>أَيْنَ سَتُسَافِرُ فِي المُسْتَقْبَلِ؟ وَلِمَاذَا؟</a:t>
@@ -18742,6 +18892,7 @@
                   <a:srgbClr val="D4AF37"/>
                 </a:solidFill>
                 <a:latin typeface="Amiri" pitchFamily="2" charset="-78"/>
+                <a:ea typeface="Amiri" pitchFamily="2" charset="-78"/>
                 <a:cs typeface="Amiri" pitchFamily="2" charset="-78"/>
               </a:rPr>
               <a:t>م</a:t>
@@ -19062,6 +19213,7 @@
                   <a:srgbClr val="8A6D1E"/>
                 </a:solidFill>
                 <a:latin typeface="Amiri" pitchFamily="2" charset="-78"/>
+                <a:ea typeface="Amiri" pitchFamily="2" charset="-78"/>
                 <a:cs typeface="Amiri" pitchFamily="2" charset="-78"/>
               </a:rPr>
               <a:t>السَّفَرُ وَالتَّفَاهُمُ بَيْنَ الشُّعُوبِ</a:t>
@@ -19342,6 +19494,7 @@
                   <a:srgbClr val="1B3B6F"/>
                 </a:solidFill>
                 <a:latin typeface="Amiri" pitchFamily="2" charset="-78"/>
+                <a:ea typeface="Amiri" pitchFamily="2" charset="-78"/>
                 <a:cs typeface="Amiri" pitchFamily="2" charset="-78"/>
               </a:rPr>
               <a:t>صَحِيحٌ أَنَّ … غَيْرَ أَنَّ …</a:t>
@@ -19418,6 +19571,7 @@
                   <a:srgbClr val="1B3B6F"/>
                 </a:solidFill>
                 <a:latin typeface="Amiri" pitchFamily="2" charset="-78"/>
+                <a:ea typeface="Amiri" pitchFamily="2" charset="-78"/>
                 <a:cs typeface="Amiri" pitchFamily="2" charset="-78"/>
               </a:rPr>
               <a:t>هَلْ يُسَاعِدُ السَّفَرُ عَلَى مُحَارَبَةِ الصُّوَرِ النَّمَطِيَّةِ؟</a:t>
@@ -19521,6 +19675,7 @@
                   <a:srgbClr val="1B3B6F"/>
                 </a:solidFill>
                 <a:latin typeface="Amiri" pitchFamily="2" charset="-78"/>
+                <a:ea typeface="Amiri" pitchFamily="2" charset="-78"/>
                 <a:cs typeface="Amiri" pitchFamily="2" charset="-78"/>
               </a:rPr>
               <a:t>مِنْ نَاحِيَةٍ … وَمِنْ نَاحِيَةٍ أُخْرَى …</a:t>
@@ -19597,6 +19752,7 @@
                   <a:srgbClr val="1B3B6F"/>
                 </a:solidFill>
                 <a:latin typeface="Amiri" pitchFamily="2" charset="-78"/>
+                <a:ea typeface="Amiri" pitchFamily="2" charset="-78"/>
                 <a:cs typeface="Amiri" pitchFamily="2" charset="-78"/>
               </a:rPr>
               <a:t>هَلْ تُؤَثِّرُ السِّيَاحَةُ سَلْبًا عَلَى المُدُنِ القَدِيمَةِ؟</a:t>
@@ -19700,6 +19856,7 @@
                   <a:srgbClr val="1B3B6F"/>
                 </a:solidFill>
                 <a:latin typeface="Amiri" pitchFamily="2" charset="-78"/>
+                <a:ea typeface="Amiri" pitchFamily="2" charset="-78"/>
                 <a:cs typeface="Amiri" pitchFamily="2" charset="-78"/>
               </a:rPr>
               <a:t>كَانَ … أَمَّا اليَوْمَ فَنَصِلُ …</a:t>
@@ -19776,6 +19933,7 @@
                   <a:srgbClr val="1B3B6F"/>
                 </a:solidFill>
                 <a:latin typeface="Amiri" pitchFamily="2" charset="-78"/>
+                <a:ea typeface="Amiri" pitchFamily="2" charset="-78"/>
                 <a:cs typeface="Amiri" pitchFamily="2" charset="-78"/>
               </a:rPr>
               <a:t>كَيْفَ تَغَيَّرَ السَّفَرُ مُنْذُ أَيَّامِ ابْنِ بَطُّوطَةَ؟</a:t>
@@ -19879,6 +20037,7 @@
                   <a:srgbClr val="1B3B6F"/>
                 </a:solidFill>
                 <a:latin typeface="Amiri" pitchFamily="2" charset="-78"/>
+                <a:ea typeface="Amiri" pitchFamily="2" charset="-78"/>
                 <a:cs typeface="Amiri" pitchFamily="2" charset="-78"/>
               </a:rPr>
               <a:t>أَدْرَكْتُ أَنَّ … عِنْدَمَا …</a:t>
@@ -19955,6 +20114,7 @@
                   <a:srgbClr val="1B3B6F"/>
                 </a:solidFill>
                 <a:latin typeface="Amiri" pitchFamily="2" charset="-78"/>
+                <a:ea typeface="Amiri" pitchFamily="2" charset="-78"/>
                 <a:cs typeface="Amiri" pitchFamily="2" charset="-78"/>
               </a:rPr>
               <a:t>مَا الَّذِي تَعَلَّمْتَهُ عَنْ ثَقَافَتِكَ أَنْتَ مِنَ السَّفَرِ؟</a:t>
@@ -20058,6 +20218,7 @@
                   <a:srgbClr val="1B3B6F"/>
                 </a:solidFill>
                 <a:latin typeface="Amiri" pitchFamily="2" charset="-78"/>
+                <a:ea typeface="Amiri" pitchFamily="2" charset="-78"/>
                 <a:cs typeface="Amiri" pitchFamily="2" charset="-78"/>
               </a:rPr>
               <a:t>لَوْ قَضَيْتُ سَنَةً، لَأَصْبَحْتُ …</a:t>
@@ -20134,6 +20295,7 @@
                   <a:srgbClr val="1B3B6F"/>
                 </a:solidFill>
                 <a:latin typeface="Amiri" pitchFamily="2" charset="-78"/>
+                <a:ea typeface="Amiri" pitchFamily="2" charset="-78"/>
                 <a:cs typeface="Amiri" pitchFamily="2" charset="-78"/>
               </a:rPr>
               <a:t>لَوْ قَضَيْتَ سَنَةً كَامِلَةً فِي بَلَدٍ عَرَبِيٍّ، كَيْفَ تَتَغَيَّرُ؟</a:t>
@@ -20343,6 +20505,7 @@
                   <a:srgbClr val="D4AF37"/>
                 </a:solidFill>
                 <a:latin typeface="Amiri" pitchFamily="2" charset="-78"/>
+                <a:ea typeface="Amiri" pitchFamily="2" charset="-78"/>
                 <a:cs typeface="Amiri" pitchFamily="2" charset="-78"/>
               </a:rPr>
               <a:t>م</a:t>
@@ -20663,6 +20826,7 @@
                   <a:srgbClr val="8A6D1E"/>
                 </a:solidFill>
                 <a:latin typeface="Amiri" pitchFamily="2" charset="-78"/>
+                <a:ea typeface="Amiri" pitchFamily="2" charset="-78"/>
                 <a:cs typeface="Amiri" pitchFamily="2" charset="-78"/>
               </a:rPr>
               <a:t>آدَابُ الصَّفِّ</a:t>
@@ -22194,6 +22358,7 @@
                   <a:srgbClr val="D4AF37"/>
                 </a:solidFill>
                 <a:latin typeface="Amiri" pitchFamily="2" charset="-78"/>
+                <a:ea typeface="Amiri" pitchFamily="2" charset="-78"/>
                 <a:cs typeface="Amiri" pitchFamily="2" charset="-78"/>
               </a:rPr>
               <a:t>م</a:t>
@@ -22514,6 +22679,7 @@
                   <a:srgbClr val="8A6D1E"/>
                 </a:solidFill>
                 <a:latin typeface="Amiri" pitchFamily="2" charset="-78"/>
+                <a:ea typeface="Amiri" pitchFamily="2" charset="-78"/>
                 <a:cs typeface="Amiri" pitchFamily="2" charset="-78"/>
               </a:rPr>
               <a:t>نَمُوذَجُ الإِجَابَةِ</a:t>
@@ -22756,6 +22922,7 @@
                   <a:srgbClr val="1B3B6F"/>
                 </a:solidFill>
                 <a:latin typeface="Amiri" pitchFamily="2" charset="-78"/>
+                <a:ea typeface="Amiri" pitchFamily="2" charset="-78"/>
                 <a:cs typeface="Amiri" pitchFamily="2" charset="-78"/>
               </a:rPr>
               <a:t>سَافَرْتُ إِلَى تُرْكِيَا فِي الصَّيْفِ.</a:t>
@@ -22832,6 +22999,7 @@
                   <a:srgbClr val="1B3B6F"/>
                 </a:solidFill>
                 <a:latin typeface="Amiri" pitchFamily="2" charset="-78"/>
+                <a:ea typeface="Amiri" pitchFamily="2" charset="-78"/>
                 <a:cs typeface="Amiri" pitchFamily="2" charset="-78"/>
               </a:rPr>
               <a:t>إِلَى أَيْنَ سَافَرْتَ آخِرَ مَرَّةٍ؟</a:t>
@@ -22935,6 +23103,7 @@
                   <a:srgbClr val="1B3B6F"/>
                 </a:solidFill>
                 <a:latin typeface="Amiri" pitchFamily="2" charset="-78"/>
+                <a:ea typeface="Amiri" pitchFamily="2" charset="-78"/>
                 <a:cs typeface="Amiri" pitchFamily="2" charset="-78"/>
               </a:rPr>
               <a:t>سَافَرْتُ مَعَ أُسْرَتِي.</a:t>
@@ -23011,6 +23180,7 @@
                   <a:srgbClr val="1B3B6F"/>
                 </a:solidFill>
                 <a:latin typeface="Amiri" pitchFamily="2" charset="-78"/>
+                <a:ea typeface="Amiri" pitchFamily="2" charset="-78"/>
                 <a:cs typeface="Amiri" pitchFamily="2" charset="-78"/>
               </a:rPr>
               <a:t>مَعَ مَنْ سَافَرْتَ؟</a:t>
@@ -23114,6 +23284,7 @@
                   <a:srgbClr val="1B3B6F"/>
                 </a:solidFill>
                 <a:latin typeface="Amiri" pitchFamily="2" charset="-78"/>
+                <a:ea typeface="Amiri" pitchFamily="2" charset="-78"/>
                 <a:cs typeface="Amiri" pitchFamily="2" charset="-78"/>
               </a:rPr>
               <a:t>نَعَمْ، أُحِبُّهُ لِأَنِّي أَرَى أَمَاكِنَ جَدِيدَةً.</a:t>
@@ -23190,6 +23361,7 @@
                   <a:srgbClr val="1B3B6F"/>
                 </a:solidFill>
                 <a:latin typeface="Amiri" pitchFamily="2" charset="-78"/>
+                <a:ea typeface="Amiri" pitchFamily="2" charset="-78"/>
                 <a:cs typeface="Amiri" pitchFamily="2" charset="-78"/>
               </a:rPr>
               <a:t>هَلْ تُحِبُّ السَّفَرَ؟ لِمَاذَا؟</a:t>
@@ -23293,6 +23465,7 @@
                   <a:srgbClr val="1B3B6F"/>
                 </a:solidFill>
                 <a:latin typeface="Amiri" pitchFamily="2" charset="-78"/>
+                <a:ea typeface="Amiri" pitchFamily="2" charset="-78"/>
                 <a:cs typeface="Amiri" pitchFamily="2" charset="-78"/>
               </a:rPr>
               <a:t>أُرِيدُ أَنْ أَزُورَ اليَابَانَ.</a:t>
@@ -23369,6 +23542,7 @@
                   <a:srgbClr val="1B3B6F"/>
                 </a:solidFill>
                 <a:latin typeface="Amiri" pitchFamily="2" charset="-78"/>
+                <a:ea typeface="Amiri" pitchFamily="2" charset="-78"/>
                 <a:cs typeface="Amiri" pitchFamily="2" charset="-78"/>
               </a:rPr>
               <a:t>مَا البَلَدُ الَّذِي تُرِيدُ أَنْ تَزُورَهُ؟</a:t>
@@ -23472,6 +23646,7 @@
                   <a:srgbClr val="1B3B6F"/>
                 </a:solidFill>
                 <a:latin typeface="Amiri" pitchFamily="2" charset="-78"/>
+                <a:ea typeface="Amiri" pitchFamily="2" charset="-78"/>
                 <a:cs typeface="Amiri" pitchFamily="2" charset="-78"/>
               </a:rPr>
               <a:t>أَحْمِلُ جَوَازَ السَّفَرِ وَمَلَابِسِي وَشَاحِنَ الهَاتِفِ.</a:t>
@@ -23548,6 +23723,7 @@
                   <a:srgbClr val="1B3B6F"/>
                 </a:solidFill>
                 <a:latin typeface="Amiri" pitchFamily="2" charset="-78"/>
+                <a:ea typeface="Amiri" pitchFamily="2" charset="-78"/>
                 <a:cs typeface="Amiri" pitchFamily="2" charset="-78"/>
               </a:rPr>
               <a:t>مَاذَا تَحْمِلُ فِي حَقِيبَةِ السَّفَرِ؟</a:t>
@@ -23757,6 +23933,7 @@
                   <a:srgbClr val="D4AF37"/>
                 </a:solidFill>
                 <a:latin typeface="Amiri" pitchFamily="2" charset="-78"/>
+                <a:ea typeface="Amiri" pitchFamily="2" charset="-78"/>
                 <a:cs typeface="Amiri" pitchFamily="2" charset="-78"/>
               </a:rPr>
               <a:t>م</a:t>
@@ -24077,6 +24254,7 @@
                   <a:srgbClr val="8A6D1E"/>
                 </a:solidFill>
                 <a:latin typeface="Amiri" pitchFamily="2" charset="-78"/>
+                <a:ea typeface="Amiri" pitchFamily="2" charset="-78"/>
                 <a:cs typeface="Amiri" pitchFamily="2" charset="-78"/>
               </a:rPr>
               <a:t>نَمُوذَجُ الإِجَابَةِ</a:t>
@@ -24319,6 +24497,7 @@
                   <a:srgbClr val="1B3B6F"/>
                 </a:solidFill>
                 <a:latin typeface="Amiri" pitchFamily="2" charset="-78"/>
+                <a:ea typeface="Amiri" pitchFamily="2" charset="-78"/>
                 <a:cs typeface="Amiri" pitchFamily="2" charset="-78"/>
               </a:rPr>
               <a:t>زُرْتُ إِسْطَنْبُولَ مَعَ عَمِّي؛ وَكَانَتِ الرِّحْلَةُ رَائِعَةً، لِأَنَّ المَدِينَةَ تَجْمَعُ بَيْنَ آسْيَا وَأُورُوبَّا.</a:t>
@@ -24395,6 +24574,7 @@
                   <a:srgbClr val="1B3B6F"/>
                 </a:solidFill>
                 <a:latin typeface="Amiri" pitchFamily="2" charset="-78"/>
+                <a:ea typeface="Amiri" pitchFamily="2" charset="-78"/>
                 <a:cs typeface="Amiri" pitchFamily="2" charset="-78"/>
               </a:rPr>
               <a:t>صِفْ رِحْلَةً لَا تَنْسَاهَا.</a:t>
@@ -24498,6 +24678,7 @@
                   <a:srgbClr val="1B3B6F"/>
                 </a:solidFill>
                 <a:latin typeface="Amiri" pitchFamily="2" charset="-78"/>
+                <a:ea typeface="Amiri" pitchFamily="2" charset="-78"/>
                 <a:cs typeface="Amiri" pitchFamily="2" charset="-78"/>
               </a:rPr>
               <a:t>لَاحَظْتُ أَنَّ المَحَلَّاتِ تُغْلَقُ وَقْتَ الظُّهْرِ فِي إِسْبَانْيَا بِسَبَبِ الحَرَارَةِ، لِذٰلِكَ يَتَسَوَّقُ النَّاسُ مَسَاءً.</a:t>
@@ -24577,6 +24758,7 @@
                   <a:srgbClr val="1B3B6F"/>
                 </a:solidFill>
                 <a:latin typeface="Amiri" pitchFamily="2" charset="-78"/>
+                <a:ea typeface="Amiri" pitchFamily="2" charset="-78"/>
                 <a:cs typeface="Amiri" pitchFamily="2" charset="-78"/>
               </a:rPr>
               <a:t>مَا الاخْتِلَافُ الثَّقَافِيُّ الَّذِي لَاحَظْتَهُ فِي بَلَدٍ آخَرَ؟</a:t>
@@ -24680,6 +24862,7 @@
                   <a:srgbClr val="1B3B6F"/>
                 </a:solidFill>
                 <a:latin typeface="Amiri" pitchFamily="2" charset="-78"/>
+                <a:ea typeface="Amiri" pitchFamily="2" charset="-78"/>
                 <a:cs typeface="Amiri" pitchFamily="2" charset="-78"/>
               </a:rPr>
               <a:t>نَعَمْ، ضَاعَتْ حَقِيبَتِي فِي المَطَارِ، مِمَّا جَعَلَنِي أَشْتَرِي مَلَابِسَ جَدِيدَةً فِي اليَوْمِ الأَوَّلِ.</a:t>
@@ -24756,6 +24939,7 @@
                   <a:srgbClr val="1B3B6F"/>
                 </a:solidFill>
                 <a:latin typeface="Amiri" pitchFamily="2" charset="-78"/>
+                <a:ea typeface="Amiri" pitchFamily="2" charset="-78"/>
                 <a:cs typeface="Amiri" pitchFamily="2" charset="-78"/>
               </a:rPr>
               <a:t>هَلْ وَاجَهْتَ مُشْكِلَةً فِي السَّفَرِ؟</a:t>
@@ -24859,6 +25043,7 @@
                   <a:srgbClr val="1B3B6F"/>
                 </a:solidFill>
                 <a:latin typeface="Amiri" pitchFamily="2" charset="-78"/>
+                <a:ea typeface="Amiri" pitchFamily="2" charset="-78"/>
                 <a:cs typeface="Amiri" pitchFamily="2" charset="-78"/>
               </a:rPr>
               <a:t>السَّائِحُ يَرَى الأَمَاكِنَ، أَمَّا طَالِبُ التَّبَادُلِ فَيَعِيشُ مَعَ النَّاسِ، لِذٰلِكَ يَفْهَمُهُمْ أَكْثَرَ.</a:t>
@@ -24935,6 +25120,7 @@
                   <a:srgbClr val="1B3B6F"/>
                 </a:solidFill>
                 <a:latin typeface="Amiri" pitchFamily="2" charset="-78"/>
+                <a:ea typeface="Amiri" pitchFamily="2" charset="-78"/>
                 <a:cs typeface="Amiri" pitchFamily="2" charset="-78"/>
               </a:rPr>
               <a:t>مَا الفَرْقُ بَيْنَ السِّيَاحَةِ وَالتَّبَادُلِ الثَّقَافِيِّ؟</a:t>
@@ -25038,6 +25224,7 @@
                   <a:srgbClr val="1B3B6F"/>
                 </a:solidFill>
                 <a:latin typeface="Amiri" pitchFamily="2" charset="-78"/>
+                <a:ea typeface="Amiri" pitchFamily="2" charset="-78"/>
                 <a:cs typeface="Amiri" pitchFamily="2" charset="-78"/>
               </a:rPr>
               <a:t>آمُلُ أَنْ أُسَافِرَ إِلَى عُمَانَ لِكَيْ أَرَى الصَّحْرَاءَ وَالجِبَالَ، وَأَتَدَرَّبَ عَلَى العَرَبِيَّةِ مَعَ النَّاسِ.</a:t>
@@ -25114,6 +25301,7 @@
                   <a:srgbClr val="1B3B6F"/>
                 </a:solidFill>
                 <a:latin typeface="Amiri" pitchFamily="2" charset="-78"/>
+                <a:ea typeface="Amiri" pitchFamily="2" charset="-78"/>
                 <a:cs typeface="Amiri" pitchFamily="2" charset="-78"/>
               </a:rPr>
               <a:t>أَيْنَ سَتُسَافِرُ فِي المُسْتَقْبَلِ؟ وَلِمَاذَا؟</a:t>
@@ -25323,6 +25511,7 @@
                   <a:srgbClr val="D4AF37"/>
                 </a:solidFill>
                 <a:latin typeface="Amiri" pitchFamily="2" charset="-78"/>
+                <a:ea typeface="Amiri" pitchFamily="2" charset="-78"/>
                 <a:cs typeface="Amiri" pitchFamily="2" charset="-78"/>
               </a:rPr>
               <a:t>م</a:t>
@@ -25643,6 +25832,7 @@
                   <a:srgbClr val="8A6D1E"/>
                 </a:solidFill>
                 <a:latin typeface="Amiri" pitchFamily="2" charset="-78"/>
+                <a:ea typeface="Amiri" pitchFamily="2" charset="-78"/>
                 <a:cs typeface="Amiri" pitchFamily="2" charset="-78"/>
               </a:rPr>
               <a:t>نَمُوذَجُ الإِجَابَةِ</a:t>
@@ -25885,6 +26075,7 @@
                   <a:srgbClr val="1B3B6F"/>
                 </a:solidFill>
                 <a:latin typeface="Amiri" pitchFamily="2" charset="-78"/>
+                <a:ea typeface="Amiri" pitchFamily="2" charset="-78"/>
                 <a:cs typeface="Amiri" pitchFamily="2" charset="-78"/>
               </a:rPr>
               <a:t>صَحِيحٌ أَنَّ بَعْضَ المُسَافِرِينَ يَعُودُونَ بِالأَفْكَارِ نَفْسِهَا، غَيْرَ أَنَّ مَنْ يُصْغِي وَيَسْأَلُ يَعُودُ بِعَقْلٍ أَوْسَعَ؛ فَالسَّفَرُ فُرْصَةٌ لَا ضَمَانٌ.</a:t>
@@ -25961,6 +26152,7 @@
                   <a:srgbClr val="1B3B6F"/>
                 </a:solidFill>
                 <a:latin typeface="Amiri" pitchFamily="2" charset="-78"/>
+                <a:ea typeface="Amiri" pitchFamily="2" charset="-78"/>
                 <a:cs typeface="Amiri" pitchFamily="2" charset="-78"/>
               </a:rPr>
               <a:t>هَلْ يُسَاعِدُ السَّفَرُ عَلَى مُحَارَبَةِ الصُّوَرِ النَّمَطِيَّةِ؟</a:t>
@@ -26064,6 +26256,7 @@
                   <a:srgbClr val="1B3B6F"/>
                 </a:solidFill>
                 <a:latin typeface="Amiri" pitchFamily="2" charset="-78"/>
+                <a:ea typeface="Amiri" pitchFamily="2" charset="-78"/>
                 <a:cs typeface="Amiri" pitchFamily="2" charset="-78"/>
               </a:rPr>
               <a:t>مِنْ نَاحِيَةٍ، تُوَفِّرُ فُرَصَ عَمَلٍ وَتَحْمِي الآثَارَ، وَمِنْ نَاحِيَةٍ أُخْرَى، تَرْفَعُ الأَسْعَارَ، مِمَّا يَدْفَعُ السُّكَّانَ الأَصْلِيِّينَ إِلَى الرَّحِيلِ.</a:t>
@@ -26140,6 +26333,7 @@
                   <a:srgbClr val="1B3B6F"/>
                 </a:solidFill>
                 <a:latin typeface="Amiri" pitchFamily="2" charset="-78"/>
+                <a:ea typeface="Amiri" pitchFamily="2" charset="-78"/>
                 <a:cs typeface="Amiri" pitchFamily="2" charset="-78"/>
               </a:rPr>
               <a:t>هَلْ تُؤَثِّرُ السِّيَاحَةُ سَلْبًا عَلَى المُدُنِ القَدِيمَةِ؟</a:t>
@@ -26243,6 +26437,7 @@
                   <a:srgbClr val="1B3B6F"/>
                 </a:solidFill>
                 <a:latin typeface="Amiri" pitchFamily="2" charset="-78"/>
+                <a:ea typeface="Amiri" pitchFamily="2" charset="-78"/>
                 <a:cs typeface="Amiri" pitchFamily="2" charset="-78"/>
               </a:rPr>
               <a:t>كَانَ ابْنُ بَطُّوطَةَ يُسَافِرُ سَنَوَاتٍ عَلَى الجِمَالِ وَالسُّفُنِ، أَمَّا اليَوْمَ فَنَصِلُ إِلَى أَيِّ قَارَّةٍ فِي سَاعَاتٍ؛ لٰكِنَّنَا نَرَى أَقَلَّ لِأَنَّنَا نَسْتَعْجِلُ.</a:t>
@@ -26319,6 +26514,7 @@
                   <a:srgbClr val="1B3B6F"/>
                 </a:solidFill>
                 <a:latin typeface="Amiri" pitchFamily="2" charset="-78"/>
+                <a:ea typeface="Amiri" pitchFamily="2" charset="-78"/>
                 <a:cs typeface="Amiri" pitchFamily="2" charset="-78"/>
               </a:rPr>
               <a:t>كَيْفَ تَغَيَّرَ السَّفَرُ مُنْذُ أَيَّامِ ابْنِ بَطُّوطَةَ؟</a:t>
@@ -26528,6 +26724,7 @@
                   <a:srgbClr val="D4AF37"/>
                 </a:solidFill>
                 <a:latin typeface="Amiri" pitchFamily="2" charset="-78"/>
+                <a:ea typeface="Amiri" pitchFamily="2" charset="-78"/>
                 <a:cs typeface="Amiri" pitchFamily="2" charset="-78"/>
               </a:rPr>
               <a:t>م</a:t>
@@ -26848,6 +27045,7 @@
                   <a:srgbClr val="8A6D1E"/>
                 </a:solidFill>
                 <a:latin typeface="Amiri" pitchFamily="2" charset="-78"/>
+                <a:ea typeface="Amiri" pitchFamily="2" charset="-78"/>
                 <a:cs typeface="Amiri" pitchFamily="2" charset="-78"/>
               </a:rPr>
               <a:t>نَمُوذَجُ الإِجَابَةِ</a:t>
@@ -27090,6 +27288,7 @@
                   <a:srgbClr val="1B3B6F"/>
                 </a:solidFill>
                 <a:latin typeface="Amiri" pitchFamily="2" charset="-78"/>
+                <a:ea typeface="Amiri" pitchFamily="2" charset="-78"/>
                 <a:cs typeface="Amiri" pitchFamily="2" charset="-78"/>
               </a:rPr>
               <a:t>أَدْرَكْتُ أَنَّ كَثِيرًا مِنْ عَادَاتِنَا لَيْسَتْ "طَبِيعِيَّةً" لِلْجَمِيعِ، عِنْدَمَا ضَحِكَتْ عَائِلَتِي المُضِيفَةُ مِنْ شُرْبِي الشَّايَ بِالحَلِيبِ!</a:t>
@@ -27166,6 +27365,7 @@
                   <a:srgbClr val="1B3B6F"/>
                 </a:solidFill>
                 <a:latin typeface="Amiri" pitchFamily="2" charset="-78"/>
+                <a:ea typeface="Amiri" pitchFamily="2" charset="-78"/>
                 <a:cs typeface="Amiri" pitchFamily="2" charset="-78"/>
               </a:rPr>
               <a:t>مَا الَّذِي تَعَلَّمْتَهُ عَنْ ثَقَافَتِكَ أَنْتَ مِنَ السَّفَرِ؟</a:t>
@@ -27269,6 +27469,7 @@
                   <a:srgbClr val="1B3B6F"/>
                 </a:solidFill>
                 <a:latin typeface="Amiri" pitchFamily="2" charset="-78"/>
+                <a:ea typeface="Amiri" pitchFamily="2" charset="-78"/>
                 <a:cs typeface="Amiri" pitchFamily="2" charset="-78"/>
               </a:rPr>
               <a:t>لَوْ قَضَيْتُ سَنَةً هُنَاكَ، لَأَصْبَحْتُ أُفَكِّرُ بِالعَرَبِيَّةِ، وَلَفَهِمْتُ النُّكَتَ وَالأَمْثَالَ، وَلَعُدْتُ جِسْرًا بَيْنَ عَالَمَيْنِ.</a:t>
@@ -27348,6 +27549,7 @@
                   <a:srgbClr val="1B3B6F"/>
                 </a:solidFill>
                 <a:latin typeface="Amiri" pitchFamily="2" charset="-78"/>
+                <a:ea typeface="Amiri" pitchFamily="2" charset="-78"/>
                 <a:cs typeface="Amiri" pitchFamily="2" charset="-78"/>
               </a:rPr>
               <a:t>لَوْ قَضَيْتَ سَنَةً كَامِلَةً فِي بَلَدٍ عَرَبِيٍّ، كَيْفَ تَتَغَيَّرُ؟</a:t>
@@ -27557,6 +27759,7 @@
                   <a:srgbClr val="D4AF37"/>
                 </a:solidFill>
                 <a:latin typeface="Amiri" pitchFamily="2" charset="-78"/>
+                <a:ea typeface="Amiri" pitchFamily="2" charset="-78"/>
                 <a:cs typeface="Amiri" pitchFamily="2" charset="-78"/>
               </a:rPr>
               <a:t>م</a:t>
@@ -27877,6 +28080,7 @@
                   <a:srgbClr val="8A6D1E"/>
                 </a:solidFill>
                 <a:latin typeface="Amiri" pitchFamily="2" charset="-78"/>
+                <a:ea typeface="Amiri" pitchFamily="2" charset="-78"/>
                 <a:cs typeface="Amiri" pitchFamily="2" charset="-78"/>
               </a:rPr>
               <a:t>قَيِّمْ عَمَلَكَ</a:t>
@@ -29121,6 +29325,7 @@
                   <a:srgbClr val="FFFFFF"/>
                 </a:solidFill>
                 <a:latin typeface="Amiri" pitchFamily="2" charset="-78"/>
+                <a:ea typeface="Amiri" pitchFamily="2" charset="-78"/>
                 <a:cs typeface="Amiri" pitchFamily="2" charset="-78"/>
               </a:rPr>
               <a:t>أَحْسَنْتُمْ! إِلَى اللِّقَاءِ</a:t>
@@ -29273,6 +29478,7 @@
                   <a:srgbClr val="D4AF37"/>
                 </a:solidFill>
                 <a:latin typeface="Amiri" pitchFamily="2" charset="-78"/>
+                <a:ea typeface="Amiri" pitchFamily="2" charset="-78"/>
                 <a:cs typeface="Amiri" pitchFamily="2" charset="-78"/>
               </a:rPr>
               <a:t>وَرْشَةُ الكِتَابَةِ</a:t>
@@ -29406,6 +29612,7 @@
                   <a:srgbClr val="D4AF37"/>
                 </a:solidFill>
                 <a:latin typeface="Amiri" pitchFamily="2" charset="-78"/>
+                <a:ea typeface="Amiri" pitchFamily="2" charset="-78"/>
                 <a:cs typeface="Amiri" pitchFamily="2" charset="-78"/>
               </a:rPr>
               <a:t>م</a:t>
@@ -29726,6 +29933,7 @@
                   <a:srgbClr val="8A6D1E"/>
                 </a:solidFill>
                 <a:latin typeface="Amiri" pitchFamily="2" charset="-78"/>
+                <a:ea typeface="Amiri" pitchFamily="2" charset="-78"/>
                 <a:cs typeface="Amiri" pitchFamily="2" charset="-78"/>
               </a:rPr>
               <a:t>خَرِيطَةُ الوَرْشَةِ</a:t>
@@ -30040,6 +30248,7 @@
                   <a:srgbClr val="1B3B6F"/>
                 </a:solidFill>
                 <a:latin typeface="Amiri" pitchFamily="2" charset="-78"/>
+                <a:ea typeface="Amiri" pitchFamily="2" charset="-78"/>
                 <a:cs typeface="Amiri" pitchFamily="2" charset="-78"/>
               </a:rPr>
               <a:t>كَيْفَ</a:t>
@@ -30316,6 +30525,7 @@
                   <a:srgbClr val="1E6B52"/>
                 </a:solidFill>
                 <a:latin typeface="Amiri" pitchFamily="2" charset="-78"/>
+                <a:ea typeface="Amiri" pitchFamily="2" charset="-78"/>
                 <a:cs typeface="Amiri" pitchFamily="2" charset="-78"/>
               </a:rPr>
               <a:t>تَمْثِيلُ الدَّوْرِ</a:t>
@@ -30592,6 +30802,7 @@
                   <a:srgbClr val="8A6D1E"/>
                 </a:solidFill>
                 <a:latin typeface="Amiri" pitchFamily="2" charset="-78"/>
+                <a:ea typeface="Amiri" pitchFamily="2" charset="-78"/>
                 <a:cs typeface="Amiri" pitchFamily="2" charset="-78"/>
               </a:rPr>
               <a:t>النَّمُوذَجُ</a:t>
@@ -30868,6 +31079,7 @@
                   <a:srgbClr val="1E6B52"/>
                 </a:solidFill>
                 <a:latin typeface="Amiri" pitchFamily="2" charset="-78"/>
+                <a:ea typeface="Amiri" pitchFamily="2" charset="-78"/>
                 <a:cs typeface="Amiri" pitchFamily="2" charset="-78"/>
               </a:rPr>
               <a:t>المُحَادَثَةُ</a:t>
@@ -31144,6 +31356,7 @@
                   <a:srgbClr val="8A6D1E"/>
                 </a:solidFill>
                 <a:latin typeface="Amiri" pitchFamily="2" charset="-78"/>
+                <a:ea typeface="Amiri" pitchFamily="2" charset="-78"/>
                 <a:cs typeface="Amiri" pitchFamily="2" charset="-78"/>
               </a:rPr>
               <a:t>قَيِّمْ</a:t>
@@ -31387,6 +31600,7 @@
                   <a:srgbClr val="D4AF37"/>
                 </a:solidFill>
                 <a:latin typeface="Amiri" pitchFamily="2" charset="-78"/>
+                <a:ea typeface="Amiri" pitchFamily="2" charset="-78"/>
                 <a:cs typeface="Amiri" pitchFamily="2" charset="-78"/>
               </a:rPr>
               <a:t>م</a:t>
@@ -31707,6 +31921,7 @@
                   <a:srgbClr val="8A6D1E"/>
                 </a:solidFill>
                 <a:latin typeface="Amiri" pitchFamily="2" charset="-78"/>
+                <a:ea typeface="Amiri" pitchFamily="2" charset="-78"/>
                 <a:cs typeface="Amiri" pitchFamily="2" charset="-78"/>
               </a:rPr>
               <a:t>امْتِحَانُ التَّحَدُّثِ</a:t>
@@ -32331,6 +32546,7 @@
                   <a:srgbClr val="1B3B6F"/>
                 </a:solidFill>
                 <a:latin typeface="Amiri" pitchFamily="2" charset="-78"/>
+                <a:ea typeface="Amiri" pitchFamily="2" charset="-78"/>
                 <a:cs typeface="Amiri" pitchFamily="2" charset="-78"/>
               </a:rPr>
               <a:t>عَفْوًا، هَلْ يُمْكِنُ أَنْ تُعِيدَ السُّؤَالَ؟</a:t>
@@ -32430,6 +32646,7 @@
                   <a:srgbClr val="1B3B6F"/>
                 </a:solidFill>
                 <a:latin typeface="Amiri" pitchFamily="2" charset="-78"/>
+                <a:ea typeface="Amiri" pitchFamily="2" charset="-78"/>
                 <a:cs typeface="Amiri" pitchFamily="2" charset="-78"/>
               </a:rPr>
               <a:t>لَحْظَةً، دَعْنِي أُفَكِّرُ …</a:t>
@@ -32529,6 +32746,7 @@
                   <a:srgbClr val="1B3B6F"/>
                 </a:solidFill>
                 <a:latin typeface="Amiri" pitchFamily="2" charset="-78"/>
+                <a:ea typeface="Amiri" pitchFamily="2" charset="-78"/>
                 <a:cs typeface="Amiri" pitchFamily="2" charset="-78"/>
               </a:rPr>
               <a:t>أَقْصِدُ …</a:t>
@@ -32700,6 +32918,7 @@
                   <a:srgbClr val="D4AF37"/>
                 </a:solidFill>
                 <a:latin typeface="Amiri" pitchFamily="2" charset="-78"/>
+                <a:ea typeface="Amiri" pitchFamily="2" charset="-78"/>
                 <a:cs typeface="Amiri" pitchFamily="2" charset="-78"/>
               </a:rPr>
               <a:t>م</a:t>
@@ -33020,6 +33239,7 @@
                   <a:srgbClr val="8A6D1E"/>
                 </a:solidFill>
                 <a:latin typeface="Amiri" pitchFamily="2" charset="-78"/>
+                <a:ea typeface="Amiri" pitchFamily="2" charset="-78"/>
                 <a:cs typeface="Amiri" pitchFamily="2" charset="-78"/>
               </a:rPr>
               <a:t>السَّفَرُ بَيْنَ المَاضِي وَالمُسْتَقْبَلِ</a:t>
@@ -33323,6 +33543,7 @@
                   <a:srgbClr val="1B3B6F"/>
                 </a:solidFill>
                 <a:latin typeface="Amiri" pitchFamily="2" charset="-78"/>
+                <a:ea typeface="Amiri" pitchFamily="2" charset="-78"/>
                 <a:cs typeface="Amiri" pitchFamily="2" charset="-78"/>
               </a:rPr>
               <a:t>رِحْلَةٌ</a:t>
@@ -33480,6 +33701,7 @@
                   <a:srgbClr val="1B3B6F"/>
                 </a:solidFill>
                 <a:latin typeface="Amiri" pitchFamily="2" charset="-78"/>
+                <a:ea typeface="Amiri" pitchFamily="2" charset="-78"/>
                 <a:cs typeface="Amiri" pitchFamily="2" charset="-78"/>
               </a:rPr>
               <a:t>السَّفَرُ</a:t>
@@ -33583,6 +33805,7 @@
                   <a:srgbClr val="1B3B6F"/>
                 </a:solidFill>
                 <a:latin typeface="Amiri" pitchFamily="2" charset="-78"/>
+                <a:ea typeface="Amiri" pitchFamily="2" charset="-78"/>
                 <a:cs typeface="Amiri" pitchFamily="2" charset="-78"/>
               </a:rPr>
               <a:t>رِحْلَاتٌ</a:t>
@@ -33848,6 +34071,7 @@
                   <a:srgbClr val="1B3B6F"/>
                 </a:solidFill>
                 <a:latin typeface="Amiri" pitchFamily="2" charset="-78"/>
+                <a:ea typeface="Amiri" pitchFamily="2" charset="-78"/>
                 <a:cs typeface="Amiri" pitchFamily="2" charset="-78"/>
               </a:rPr>
               <a:t>تَبَادُلٌ ثَقَافِيٌّ</a:t>
@@ -34005,6 +34229,7 @@
                   <a:srgbClr val="1B3B6F"/>
                 </a:solidFill>
                 <a:latin typeface="Amiri" pitchFamily="2" charset="-78"/>
+                <a:ea typeface="Amiri" pitchFamily="2" charset="-78"/>
                 <a:cs typeface="Amiri" pitchFamily="2" charset="-78"/>
               </a:rPr>
               <a:t>بَرْنَامَجٌ</a:t>
@@ -34108,6 +34333,7 @@
                   <a:srgbClr val="1B3B6F"/>
                 </a:solidFill>
                 <a:latin typeface="Amiri" pitchFamily="2" charset="-78"/>
+                <a:ea typeface="Amiri" pitchFamily="2" charset="-78"/>
                 <a:cs typeface="Amiri" pitchFamily="2" charset="-78"/>
               </a:rPr>
               <a:t>طَالِبُ تَبَادُلٍ · طَالِبَةُ تَبَادُلٍ</a:t>
@@ -34373,6 +34599,7 @@
                   <a:srgbClr val="1B3B6F"/>
                 </a:solidFill>
                 <a:latin typeface="Amiri" pitchFamily="2" charset="-78"/>
+                <a:ea typeface="Amiri" pitchFamily="2" charset="-78"/>
                 <a:cs typeface="Amiri" pitchFamily="2" charset="-78"/>
               </a:rPr>
               <a:t>العَائِلَةُ المُضِيفَةُ</a:t>
@@ -34530,6 +34757,7 @@
                   <a:srgbClr val="1B3B6F"/>
                 </a:solidFill>
                 <a:latin typeface="Amiri" pitchFamily="2" charset="-78"/>
+                <a:ea typeface="Amiri" pitchFamily="2" charset="-78"/>
                 <a:cs typeface="Amiri" pitchFamily="2" charset="-78"/>
               </a:rPr>
               <a:t>سَكَنٌ</a:t>
@@ -34633,6 +34861,7 @@
                   <a:srgbClr val="1B3B6F"/>
                 </a:solidFill>
                 <a:latin typeface="Amiri" pitchFamily="2" charset="-78"/>
+                <a:ea typeface="Amiri" pitchFamily="2" charset="-78"/>
                 <a:cs typeface="Amiri" pitchFamily="2" charset="-78"/>
               </a:rPr>
               <a:t>أَقَمْتُ عِنْدَ</a:t>
@@ -34898,6 +35127,7 @@
                   <a:srgbClr val="1B3B6F"/>
                 </a:solidFill>
                 <a:latin typeface="Amiri" pitchFamily="2" charset="-78"/>
+                <a:ea typeface="Amiri" pitchFamily="2" charset="-78"/>
                 <a:cs typeface="Amiri" pitchFamily="2" charset="-78"/>
               </a:rPr>
               <a:t>زُرْتُ · قَضَيْتُ</a:t>
@@ -35055,6 +35285,7 @@
                   <a:srgbClr val="1B3B6F"/>
                 </a:solidFill>
                 <a:latin typeface="Amiri" pitchFamily="2" charset="-78"/>
+                <a:ea typeface="Amiri" pitchFamily="2" charset="-78"/>
                 <a:cs typeface="Amiri" pitchFamily="2" charset="-78"/>
               </a:rPr>
               <a:t>سَافَرْتُ</a:t>
@@ -35158,6 +35389,7 @@
                   <a:srgbClr val="1B3B6F"/>
                 </a:solidFill>
                 <a:latin typeface="Amiri" pitchFamily="2" charset="-78"/>
+                <a:ea typeface="Amiri" pitchFamily="2" charset="-78"/>
                 <a:cs typeface="Amiri" pitchFamily="2" charset="-78"/>
               </a:rPr>
               <a:t>أَقَمْتُ</a:t>
@@ -35423,6 +35655,7 @@
                   <a:srgbClr val="1B3B6F"/>
                 </a:solidFill>
                 <a:latin typeface="Amiri" pitchFamily="2" charset="-78"/>
+                <a:ea typeface="Amiri" pitchFamily="2" charset="-78"/>
                 <a:cs typeface="Amiri" pitchFamily="2" charset="-78"/>
               </a:rPr>
               <a:t>سَأُسَافِرُ</a:t>
@@ -35580,6 +35813,7 @@
                   <a:srgbClr val="1B3B6F"/>
                 </a:solidFill>
                 <a:latin typeface="Amiri" pitchFamily="2" charset="-78"/>
+                <a:ea typeface="Amiri" pitchFamily="2" charset="-78"/>
                 <a:cs typeface="Amiri" pitchFamily="2" charset="-78"/>
               </a:rPr>
               <a:t>أَنْوِي أَنْ</a:t>
@@ -35683,6 +35917,7 @@
                   <a:srgbClr val="1B3B6F"/>
                 </a:solidFill>
                 <a:latin typeface="Amiri" pitchFamily="2" charset="-78"/>
+                <a:ea typeface="Amiri" pitchFamily="2" charset="-78"/>
                 <a:cs typeface="Amiri" pitchFamily="2" charset="-78"/>
               </a:rPr>
               <a:t>آمُلُ أَنْ</a:t>
@@ -35948,6 +36183,7 @@
                   <a:srgbClr val="1B3B6F"/>
                 </a:solidFill>
                 <a:latin typeface="Amiri" pitchFamily="2" charset="-78"/>
+                <a:ea typeface="Amiri" pitchFamily="2" charset="-78"/>
                 <a:cs typeface="Amiri" pitchFamily="2" charset="-78"/>
               </a:rPr>
               <a:t>بِسَبَبِ</a:t>
@@ -36105,6 +36341,7 @@
                   <a:srgbClr val="1B3B6F"/>
                 </a:solidFill>
                 <a:latin typeface="Amiri" pitchFamily="2" charset="-78"/>
+                <a:ea typeface="Amiri" pitchFamily="2" charset="-78"/>
                 <a:cs typeface="Amiri" pitchFamily="2" charset="-78"/>
               </a:rPr>
               <a:t>لِذٰلِكَ</a:t>
@@ -36208,6 +36445,7 @@
                   <a:srgbClr val="1B3B6F"/>
                 </a:solidFill>
                 <a:latin typeface="Amiri" pitchFamily="2" charset="-78"/>
+                <a:ea typeface="Amiri" pitchFamily="2" charset="-78"/>
                 <a:cs typeface="Amiri" pitchFamily="2" charset="-78"/>
               </a:rPr>
               <a:t>لِأَنَّ</a:t>
@@ -36341,6 +36579,7 @@
                   <a:srgbClr val="D4AF37"/>
                 </a:solidFill>
                 <a:latin typeface="Amiri" pitchFamily="2" charset="-78"/>
+                <a:ea typeface="Amiri" pitchFamily="2" charset="-78"/>
                 <a:cs typeface="Amiri" pitchFamily="2" charset="-78"/>
               </a:rPr>
               <a:t>م</a:t>
@@ -36661,6 +36900,7 @@
                   <a:srgbClr val="8A6D1E"/>
                 </a:solidFill>
                 <a:latin typeface="Amiri" pitchFamily="2" charset="-78"/>
+                <a:ea typeface="Amiri" pitchFamily="2" charset="-78"/>
                 <a:cs typeface="Amiri" pitchFamily="2" charset="-78"/>
               </a:rPr>
               <a:t>السَّبَبُ وَالنَّتِيجَةُ</a:t>
@@ -36964,6 +37204,7 @@
                   <a:srgbClr val="1B3B6F"/>
                 </a:solidFill>
                 <a:latin typeface="Amiri" pitchFamily="2" charset="-78"/>
+                <a:ea typeface="Amiri" pitchFamily="2" charset="-78"/>
                 <a:cs typeface="Amiri" pitchFamily="2" charset="-78"/>
               </a:rPr>
               <a:t>مِمَّا</a:t>
@@ -37121,6 +37362,7 @@
                   <a:srgbClr val="1B3B6F"/>
                 </a:solidFill>
                 <a:latin typeface="Amiri" pitchFamily="2" charset="-78"/>
+                <a:ea typeface="Amiri" pitchFamily="2" charset="-78"/>
                 <a:cs typeface="Amiri" pitchFamily="2" charset="-78"/>
               </a:rPr>
               <a:t>أَدَّى إِلَى</a:t>
@@ -37224,6 +37466,7 @@
                   <a:srgbClr val="1B3B6F"/>
                 </a:solidFill>
                 <a:latin typeface="Amiri" pitchFamily="2" charset="-78"/>
+                <a:ea typeface="Amiri" pitchFamily="2" charset="-78"/>
                 <a:cs typeface="Amiri" pitchFamily="2" charset="-78"/>
               </a:rPr>
               <a:t>نَتِيجَةً لِذٰلِكَ</a:t>
@@ -37489,6 +37732,7 @@
                   <a:srgbClr val="1B3B6F"/>
                 </a:solidFill>
                 <a:latin typeface="Amiri" pitchFamily="2" charset="-78"/>
+                <a:ea typeface="Amiri" pitchFamily="2" charset="-78"/>
                 <a:cs typeface="Amiri" pitchFamily="2" charset="-78"/>
               </a:rPr>
               <a:t>تَفَاهُمٌ</a:t>
@@ -37646,6 +37890,7 @@
                   <a:srgbClr val="1B3B6F"/>
                 </a:solidFill>
                 <a:latin typeface="Amiri" pitchFamily="2" charset="-78"/>
+                <a:ea typeface="Amiri" pitchFamily="2" charset="-78"/>
                 <a:cs typeface="Amiri" pitchFamily="2" charset="-78"/>
               </a:rPr>
               <a:t>صُورَةٌ نَمَطِيَّةٌ</a:t>
@@ -37749,6 +37994,7 @@
                   <a:srgbClr val="1B3B6F"/>
                 </a:solidFill>
                 <a:latin typeface="Amiri" pitchFamily="2" charset="-78"/>
+                <a:ea typeface="Amiri" pitchFamily="2" charset="-78"/>
                 <a:cs typeface="Amiri" pitchFamily="2" charset="-78"/>
               </a:rPr>
               <a:t>فَهِمْتُ</a:t>
@@ -38014,6 +38260,7 @@
                   <a:srgbClr val="1B3B6F"/>
                 </a:solidFill>
                 <a:latin typeface="Amiri" pitchFamily="2" charset="-78"/>
+                <a:ea typeface="Amiri" pitchFamily="2" charset="-78"/>
                 <a:cs typeface="Amiri" pitchFamily="2" charset="-78"/>
               </a:rPr>
               <a:t>اخْتِلَافٌ</a:t>
@@ -38171,6 +38418,7 @@
                   <a:srgbClr val="1B3B6F"/>
                 </a:solidFill>
                 <a:latin typeface="Amiri" pitchFamily="2" charset="-78"/>
+                <a:ea typeface="Amiri" pitchFamily="2" charset="-78"/>
                 <a:cs typeface="Amiri" pitchFamily="2" charset="-78"/>
               </a:rPr>
               <a:t>تَشَابُهٌ</a:t>
@@ -38274,6 +38522,7 @@
                   <a:srgbClr val="1B3B6F"/>
                 </a:solidFill>
                 <a:latin typeface="Amiri" pitchFamily="2" charset="-78"/>
+                <a:ea typeface="Amiri" pitchFamily="2" charset="-78"/>
                 <a:cs typeface="Amiri" pitchFamily="2" charset="-78"/>
               </a:rPr>
               <a:t>اخْتِلَافَاتٌ</a:t>
@@ -38539,6 +38788,7 @@
                   <a:srgbClr val="1B3B6F"/>
                 </a:solidFill>
                 <a:latin typeface="Amiri" pitchFamily="2" charset="-78"/>
+                <a:ea typeface="Amiri" pitchFamily="2" charset="-78"/>
                 <a:cs typeface="Amiri" pitchFamily="2" charset="-78"/>
               </a:rPr>
               <a:t>تَغَيَّرَتْ نَظْرَتِي</a:t>
@@ -38696,6 +38946,7 @@
                   <a:srgbClr val="1B3B6F"/>
                 </a:solidFill>
                 <a:latin typeface="Amiri" pitchFamily="2" charset="-78"/>
+                <a:ea typeface="Amiri" pitchFamily="2" charset="-78"/>
                 <a:cs typeface="Amiri" pitchFamily="2" charset="-78"/>
               </a:rPr>
               <a:t>أَدْرَكْتُ</a:t>
@@ -38799,6 +39050,7 @@
                   <a:srgbClr val="1B3B6F"/>
                 </a:solidFill>
                 <a:latin typeface="Amiri" pitchFamily="2" charset="-78"/>
+                <a:ea typeface="Amiri" pitchFamily="2" charset="-78"/>
                 <a:cs typeface="Amiri" pitchFamily="2" charset="-78"/>
               </a:rPr>
               <a:t>اكْتَشَفْتُ</a:t>
@@ -39064,6 +39316,7 @@
                   <a:srgbClr val="1B3B6F"/>
                 </a:solidFill>
                 <a:latin typeface="Amiri" pitchFamily="2" charset="-78"/>
+                <a:ea typeface="Amiri" pitchFamily="2" charset="-78"/>
                 <a:cs typeface="Amiri" pitchFamily="2" charset="-78"/>
               </a:rPr>
               <a:t>جَوَازُ السَّفَرِ</a:t>
@@ -39221,6 +39474,7 @@
                   <a:srgbClr val="1B3B6F"/>
                 </a:solidFill>
                 <a:latin typeface="Amiri" pitchFamily="2" charset="-78"/>
+                <a:ea typeface="Amiri" pitchFamily="2" charset="-78"/>
                 <a:cs typeface="Amiri" pitchFamily="2" charset="-78"/>
               </a:rPr>
               <a:t>حَقِيبَةُ السَّفَرِ</a:t>
@@ -39324,6 +39578,7 @@
                   <a:srgbClr val="1B3B6F"/>
                 </a:solidFill>
                 <a:latin typeface="Amiri" pitchFamily="2" charset="-78"/>
+                <a:ea typeface="Amiri" pitchFamily="2" charset="-78"/>
                 <a:cs typeface="Amiri" pitchFamily="2" charset="-78"/>
               </a:rPr>
               <a:t>تَأْشِيرَةٌ</a:t>
@@ -39589,6 +39844,7 @@
                   <a:srgbClr val="1B3B6F"/>
                 </a:solidFill>
                 <a:latin typeface="Amiri" pitchFamily="2" charset="-78"/>
+                <a:ea typeface="Amiri" pitchFamily="2" charset="-78"/>
                 <a:cs typeface="Amiri" pitchFamily="2" charset="-78"/>
               </a:rPr>
               <a:t>سَائِحٌ · مُسَافِرٌ</a:t>
@@ -39746,6 +40002,7 @@
                   <a:srgbClr val="1B3B6F"/>
                 </a:solidFill>
                 <a:latin typeface="Amiri" pitchFamily="2" charset="-78"/>
+                <a:ea typeface="Amiri" pitchFamily="2" charset="-78"/>
                 <a:cs typeface="Amiri" pitchFamily="2" charset="-78"/>
               </a:rPr>
               <a:t>سُيَّاحٌ · مُسَافِرُونَ</a:t>
@@ -39849,6 +40106,7 @@
                   <a:srgbClr val="1B3B6F"/>
                 </a:solidFill>
                 <a:latin typeface="Amiri" pitchFamily="2" charset="-78"/>
+                <a:ea typeface="Amiri" pitchFamily="2" charset="-78"/>
                 <a:cs typeface="Amiri" pitchFamily="2" charset="-78"/>
               </a:rPr>
               <a:t>سَائِحَةٌ · مُسَافِرَةٌ</a:t>
@@ -39982,6 +40240,7 @@
                   <a:srgbClr val="D4AF37"/>
                 </a:solidFill>
                 <a:latin typeface="Amiri" pitchFamily="2" charset="-78"/>
+                <a:ea typeface="Amiri" pitchFamily="2" charset="-78"/>
                 <a:cs typeface="Amiri" pitchFamily="2" charset="-78"/>
               </a:rPr>
               <a:t>م</a:t>
@@ -40302,6 +40561,7 @@
                   <a:srgbClr val="8A6D1E"/>
                 </a:solidFill>
                 <a:latin typeface="Amiri" pitchFamily="2" charset="-78"/>
+                <a:ea typeface="Amiri" pitchFamily="2" charset="-78"/>
                 <a:cs typeface="Amiri" pitchFamily="2" charset="-78"/>
               </a:rPr>
               <a:t>فِي الغُرَفِ</a:t>
@@ -41478,6 +41738,7 @@
                   <a:srgbClr val="1B3B6F"/>
                 </a:solidFill>
                 <a:latin typeface="Amiri" pitchFamily="2" charset="-78"/>
+                <a:ea typeface="Amiri" pitchFamily="2" charset="-78"/>
                 <a:cs typeface="Amiri" pitchFamily="2" charset="-78"/>
               </a:rPr>
               <a:t>دَوْرُكَ!</a:t>
@@ -41554,6 +41815,7 @@
                   <a:srgbClr val="1B3B6F"/>
                 </a:solidFill>
                 <a:latin typeface="Amiri" pitchFamily="2" charset="-78"/>
+                <a:ea typeface="Amiri" pitchFamily="2" charset="-78"/>
                 <a:cs typeface="Amiri" pitchFamily="2" charset="-78"/>
               </a:rPr>
               <a:t>أَحْسَنْتَ! / أَحْسَنْتِ!</a:t>
@@ -41630,6 +41892,7 @@
                   <a:srgbClr val="1B3B6F"/>
                 </a:solidFill>
                 <a:latin typeface="Amiri" pitchFamily="2" charset="-78"/>
+                <a:ea typeface="Amiri" pitchFamily="2" charset="-78"/>
                 <a:cs typeface="Amiri" pitchFamily="2" charset="-78"/>
               </a:rPr>
               <a:t>تَكَلَّمْ أَكْثَرَ، مِنْ فَضْلِكَ</a:t>
@@ -41706,6 +41969,7 @@
                   <a:srgbClr val="1B3B6F"/>
                 </a:solidFill>
                 <a:latin typeface="Amiri" pitchFamily="2" charset="-78"/>
+                <a:ea typeface="Amiri" pitchFamily="2" charset="-78"/>
                 <a:cs typeface="Amiri" pitchFamily="2" charset="-78"/>
               </a:rPr>
               <a:t>لِمَاذَا؟</a:t>
@@ -41877,6 +42141,7 @@
                   <a:srgbClr val="D4AF37"/>
                 </a:solidFill>
                 <a:latin typeface="Amiri" pitchFamily="2" charset="-78"/>
+                <a:ea typeface="Amiri" pitchFamily="2" charset="-78"/>
                 <a:cs typeface="Amiri" pitchFamily="2" charset="-78"/>
               </a:rPr>
               <a:t>م</a:t>
@@ -42197,6 +42462,7 @@
                   <a:srgbClr val="8A6D1E"/>
                 </a:solidFill>
                 <a:latin typeface="Amiri" pitchFamily="2" charset="-78"/>
+                <a:ea typeface="Amiri" pitchFamily="2" charset="-78"/>
                 <a:cs typeface="Amiri" pitchFamily="2" charset="-78"/>
               </a:rPr>
               <a:t>مَعَ العَائِلَةِ المُضِيفَةِ</a:t>
@@ -42477,6 +42743,7 @@
                   <a:srgbClr val="1B3B6F"/>
                 </a:solidFill>
                 <a:latin typeface="Amiri" pitchFamily="2" charset="-78"/>
+                <a:ea typeface="Amiri" pitchFamily="2" charset="-78"/>
                 <a:cs typeface="Amiri" pitchFamily="2" charset="-78"/>
               </a:rPr>
               <a:t>كَانَتِ الرِّحْلَةُ … لٰكِنَّ …</a:t>
@@ -42553,6 +42820,7 @@
                   <a:srgbClr val="1B3B6F"/>
                 </a:solidFill>
                 <a:latin typeface="Amiri" pitchFamily="2" charset="-78"/>
+                <a:ea typeface="Amiri" pitchFamily="2" charset="-78"/>
                 <a:cs typeface="Amiri" pitchFamily="2" charset="-78"/>
               </a:rPr>
               <a:t>أَهْلًا وَسَهْلًا فِي فَاسَ! كَيْفَ كَانَتِ الرِّحْلَةُ؟</a:t>
@@ -42721,6 +42989,7 @@
                   <a:srgbClr val="1B3B6F"/>
                 </a:solidFill>
                 <a:latin typeface="Amiri" pitchFamily="2" charset="-78"/>
+                <a:ea typeface="Amiri" pitchFamily="2" charset="-78"/>
                 <a:cs typeface="Amiri" pitchFamily="2" charset="-78"/>
               </a:rPr>
               <a:t>سَافَرْتُ بِالطَّائِرَةِ / بِالقِطَارِ …</a:t>
@@ -42797,6 +43066,7 @@
                   <a:srgbClr val="1B3B6F"/>
                 </a:solidFill>
                 <a:latin typeface="Amiri" pitchFamily="2" charset="-78"/>
+                <a:ea typeface="Amiri" pitchFamily="2" charset="-78"/>
                 <a:cs typeface="Amiri" pitchFamily="2" charset="-78"/>
               </a:rPr>
               <a:t>كَيْفَ جِئْتَ؟</a:t>
@@ -42965,6 +43235,7 @@
                   <a:srgbClr val="1B3B6F"/>
                 </a:solidFill>
                 <a:latin typeface="Amiri" pitchFamily="2" charset="-78"/>
+                <a:ea typeface="Amiri" pitchFamily="2" charset="-78"/>
                 <a:cs typeface="Amiri" pitchFamily="2" charset="-78"/>
               </a:rPr>
               <a:t>شُكْرًا، الغُرْفَةُ …</a:t>
@@ -43041,6 +43312,7 @@
                   <a:srgbClr val="1B3B6F"/>
                 </a:solidFill>
                 <a:latin typeface="Amiri" pitchFamily="2" charset="-78"/>
+                <a:ea typeface="Amiri" pitchFamily="2" charset="-78"/>
                 <a:cs typeface="Amiri" pitchFamily="2" charset="-78"/>
               </a:rPr>
               <a:t>هٰذِهِ غُرْفَتُكَ. هَلْ تُعْجِبُكَ؟</a:t>
@@ -43209,6 +43481,7 @@
                   <a:srgbClr val="1B3B6F"/>
                 </a:solidFill>
                 <a:latin typeface="Amiri" pitchFamily="2" charset="-78"/>
+                <a:ea typeface="Amiri" pitchFamily="2" charset="-78"/>
                 <a:cs typeface="Amiri" pitchFamily="2" charset="-78"/>
               </a:rPr>
               <a:t>وَمَتَى …؟</a:t>
@@ -43285,6 +43558,7 @@
                   <a:srgbClr val="1B3B6F"/>
                 </a:solidFill>
                 <a:latin typeface="Amiri" pitchFamily="2" charset="-78"/>
+                <a:ea typeface="Amiri" pitchFamily="2" charset="-78"/>
                 <a:cs typeface="Amiri" pitchFamily="2" charset="-78"/>
               </a:rPr>
               <a:t>نَتَعَشَّى فِي السَّاعَةِ التَّاسِعَةِ.</a:t>
@@ -43453,6 +43727,7 @@
                   <a:srgbClr val="1B3B6F"/>
                 </a:solidFill>
                 <a:latin typeface="Amiri" pitchFamily="2" charset="-78"/>
+                <a:ea typeface="Amiri" pitchFamily="2" charset="-78"/>
                 <a:cs typeface="Amiri" pitchFamily="2" charset="-78"/>
               </a:rPr>
               <a:t>أُرِيدُ أَنْ أَزُورَ … لِأَنَّ …</a:t>
@@ -43529,6 +43804,7 @@
                   <a:srgbClr val="1B3B6F"/>
                 </a:solidFill>
                 <a:latin typeface="Amiri" pitchFamily="2" charset="-78"/>
+                <a:ea typeface="Amiri" pitchFamily="2" charset="-78"/>
                 <a:cs typeface="Amiri" pitchFamily="2" charset="-78"/>
               </a:rPr>
               <a:t>فِي السَّابِعَةِ. مَاذَا تُرِيدُ أَنْ تَرَى فِي فَاسَ؟</a:t>
@@ -43803,6 +44079,7 @@
                   <a:srgbClr val="D4AF37"/>
                 </a:solidFill>
                 <a:latin typeface="Amiri" pitchFamily="2" charset="-78"/>
+                <a:ea typeface="Amiri" pitchFamily="2" charset="-78"/>
                 <a:cs typeface="Amiri" pitchFamily="2" charset="-78"/>
               </a:rPr>
               <a:t>م</a:t>
@@ -44123,6 +44400,7 @@
                   <a:srgbClr val="8A6D1E"/>
                 </a:solidFill>
                 <a:latin typeface="Amiri" pitchFamily="2" charset="-78"/>
+                <a:ea typeface="Amiri" pitchFamily="2" charset="-78"/>
                 <a:cs typeface="Amiri" pitchFamily="2" charset="-78"/>
               </a:rPr>
               <a:t>التَّقَدُّمُ لِتَبَادُلٍ إِلَى الأُرْدُنِّ</a:t>
@@ -44403,6 +44681,7 @@
                   <a:srgbClr val="1B3B6F"/>
                 </a:solidFill>
                 <a:latin typeface="Amiri" pitchFamily="2" charset="-78"/>
+                <a:ea typeface="Amiri" pitchFamily="2" charset="-78"/>
                 <a:cs typeface="Amiri" pitchFamily="2" charset="-78"/>
               </a:rPr>
               <a:t>لِأَنِّي أُرِيدُ أَنْ …</a:t>
@@ -44479,6 +44758,7 @@
                   <a:srgbClr val="1B3B6F"/>
                 </a:solidFill>
                 <a:latin typeface="Amiri" pitchFamily="2" charset="-78"/>
+                <a:ea typeface="Amiri" pitchFamily="2" charset="-78"/>
                 <a:cs typeface="Amiri" pitchFamily="2" charset="-78"/>
               </a:rPr>
               <a:t>لِمَاذَا تُرِيدُ أَنْ تُشَارِكَ فِي التَّبَادُلِ؟</a:t>
@@ -44647,6 +44927,7 @@
                   <a:srgbClr val="1B3B6F"/>
                 </a:solidFill>
                 <a:latin typeface="Amiri" pitchFamily="2" charset="-78"/>
+                <a:ea typeface="Amiri" pitchFamily="2" charset="-78"/>
                 <a:cs typeface="Amiri" pitchFamily="2" charset="-78"/>
               </a:rPr>
               <a:t>نَعَمْ، زُرْتُ … فِي …</a:t>
@@ -44723,6 +45004,7 @@
                   <a:srgbClr val="1B3B6F"/>
                 </a:solidFill>
                 <a:latin typeface="Amiri" pitchFamily="2" charset="-78"/>
+                <a:ea typeface="Amiri" pitchFamily="2" charset="-78"/>
                 <a:cs typeface="Amiri" pitchFamily="2" charset="-78"/>
               </a:rPr>
               <a:t>هَلْ سَافَرْتَ إِلَى بَلَدٍ عَرَبِيٍّ مِنْ قَبْلُ؟</a:t>
@@ -44891,6 +45173,7 @@
                   <a:srgbClr val="1B3B6F"/>
                 </a:solidFill>
                 <a:latin typeface="Amiri" pitchFamily="2" charset="-78"/>
+                <a:ea typeface="Amiri" pitchFamily="2" charset="-78"/>
                 <a:cs typeface="Amiri" pitchFamily="2" charset="-78"/>
               </a:rPr>
               <a:t>تَعَلَّمْتُ … ؛ لِذٰلِكَ …</a:t>
@@ -44967,6 +45250,7 @@
                   <a:srgbClr val="1B3B6F"/>
                 </a:solidFill>
                 <a:latin typeface="Amiri" pitchFamily="2" charset="-78"/>
+                <a:ea typeface="Amiri" pitchFamily="2" charset="-78"/>
                 <a:cs typeface="Amiri" pitchFamily="2" charset="-78"/>
               </a:rPr>
               <a:t>مَاذَا تَعَلَّمْتَ مِنْ تِلْكَ الرِّحْلَةِ؟</a:t>
@@ -45070,6 +45354,7 @@
                   <a:srgbClr val="1B3B6F"/>
                 </a:solidFill>
                 <a:latin typeface="Amiri" pitchFamily="2" charset="-78"/>
+                <a:ea typeface="Amiri" pitchFamily="2" charset="-78"/>
                 <a:cs typeface="Amiri" pitchFamily="2" charset="-78"/>
               </a:rPr>
               <a:t>هَلْ …؟ وَكَيْفَ …؟</a:t>
@@ -45146,6 +45431,7 @@
                   <a:srgbClr val="1B3B6F"/>
                 </a:solidFill>
                 <a:latin typeface="Amiri" pitchFamily="2" charset="-78"/>
+                <a:ea typeface="Amiri" pitchFamily="2" charset="-78"/>
                 <a:cs typeface="Amiri" pitchFamily="2" charset="-78"/>
               </a:rPr>
               <a:t>سَتَسْكُنُ مَعَ عَائِلَةٍ فِي عَمَّانَ ثَلَاثَةَ أَسَابِيعَ.</a:t>
@@ -45249,6 +45535,7 @@
                   <a:srgbClr val="1B3B6F"/>
                 </a:solidFill>
                 <a:latin typeface="Amiri" pitchFamily="2" charset="-78"/>
+                <a:ea typeface="Amiri" pitchFamily="2" charset="-78"/>
                 <a:cs typeface="Amiri" pitchFamily="2" charset="-78"/>
               </a:rPr>
               <a:t>أَتَوَقَّعُ … بِسَبَبِ … ، لِذٰلِكَ …</a:t>
@@ -45325,6 +45612,7 @@
                   <a:srgbClr val="1B3B6F"/>
                 </a:solidFill>
                 <a:latin typeface="Amiri" pitchFamily="2" charset="-78"/>
+                <a:ea typeface="Amiri" pitchFamily="2" charset="-78"/>
                 <a:cs typeface="Amiri" pitchFamily="2" charset="-78"/>
               </a:rPr>
               <a:t>نَعَمْ، وَبِالحَافِلَةِ. مَا الصُّعُوبَةُ الَّتِي تَتَوَقَّعُهَا؟</a:t>
@@ -45499,13 +45787,9 @@
     <a:fontScheme name="Office">
       <a:majorFont>
         <a:latin typeface="Calibri Light" panose="020F0302020204030204"/>
-        <a:ea typeface=""/>
-        <a:cs typeface=""/>
-        <a:font script="Jpan" typeface="游ゴシック Light"/>
-        <a:font script="Hang" typeface="맑은 고딕"/>
-        <a:font script="Hans" typeface="等线 Light"/>
-        <a:font script="Hant" typeface="新細明體"/>
-        <a:font script="Arab" typeface="Times New Roman"/>
+        <a:ea typeface="Amiri" pitchFamily="2" charset="-78"/>
+        <a:cs typeface="Amiri" pitchFamily="2" charset="-78"/>
+        <a:font script="Arab" typeface="Amiri"/>
         <a:font script="Hebr" typeface="Times New Roman"/>
         <a:font script="Thai" typeface="Angsana New"/>
         <a:font script="Ethi" typeface="Nyala"/>
@@ -45551,13 +45835,9 @@
       </a:majorFont>
       <a:minorFont>
         <a:latin typeface="Calibri" panose="020F0502020204030204"/>
-        <a:ea typeface=""/>
-        <a:cs typeface=""/>
-        <a:font script="Jpan" typeface="游ゴシック"/>
-        <a:font script="Hang" typeface="맑은 고딕"/>
-        <a:font script="Hans" typeface="等线"/>
-        <a:font script="Hant" typeface="新細明體"/>
-        <a:font script="Arab" typeface="Arial"/>
+        <a:ea typeface="Amiri" pitchFamily="2" charset="-78"/>
+        <a:cs typeface="Amiri" pitchFamily="2" charset="-78"/>
+        <a:font script="Arab" typeface="Amiri"/>
         <a:font script="Hebr" typeface="Arial"/>
         <a:font script="Thai" typeface="Cordia New"/>
         <a:font script="Ethi" typeface="Nyala"/>
